--- a/examples/pptx/env-file-best-practice.pptx
+++ b/examples/pptx/env-file-best-practice.pptx
@@ -3558,6 +3558,43 @@
         <p:spPr>
           <a:xfrm>
             <a:off x="6233160" y="1499616"/>
+            <a:ext cx="5958840" cy="609600"/>
+          </a:xfrm>
+          <a:prstGeom prst="rect">
+            <a:avLst/>
+          </a:prstGeom>
+          <a:noFill/>
+        </p:spPr>
+        <p:txBody>
+          <a:bodyPr wrap="none" lIns="0" rIns="0">
+            <a:noAutofit/>
+          </a:bodyPr>
+          <a:lstStyle/>
+          <a:p>
+            <a:pPr algn="l"/>
+            <a:r>
+              <a:rPr sz="3400" b="0" i="0">
+                <a:solidFill>
+                  <a:srgbClr val="0A2240"/>
+                </a:solidFill>
+                <a:latin typeface="Arial"/>
+              </a:rPr>
+              <a:t>Built with customers.</a:t>
+            </a:r>
+          </a:p>
+        </p:txBody>
+      </p:sp>
+      <p:sp>
+        <p:nvSpPr>
+          <p:cNvPr id="7" name="TextBox 6"/>
+          <p:cNvSpPr/>
+          <p:nvPr>
+            <p:ph type="body" idx="2"/>
+          </p:nvPr>
+        </p:nvSpPr>
+        <p:spPr>
+          <a:xfrm>
+            <a:off x="6233160" y="2383536"/>
             <a:ext cx="5501640" cy="1127760"/>
           </a:xfrm>
           <a:prstGeom prst="rect">
@@ -3579,44 +3616,7 @@
                 </a:solidFill>
                 <a:latin typeface="Arial"/>
               </a:rPr>
-              <a:t>Built with customers, not just for them.</a:t>
-            </a:r>
-          </a:p>
-        </p:txBody>
-      </p:sp>
-      <p:sp>
-        <p:nvSpPr>
-          <p:cNvPr id="7" name="TextBox 6"/>
-          <p:cNvSpPr/>
-          <p:nvPr>
-            <p:ph type="body" idx="2"/>
-          </p:nvPr>
-        </p:nvSpPr>
-        <p:spPr>
-          <a:xfrm>
-            <a:off x="6233160" y="2901696"/>
-            <a:ext cx="5501640" cy="1127760"/>
-          </a:xfrm>
-          <a:prstGeom prst="rect">
-            <a:avLst/>
-          </a:prstGeom>
-          <a:noFill/>
-        </p:spPr>
-        <p:txBody>
-          <a:bodyPr wrap="square" lIns="0" rIns="0">
-            <a:noAutofit/>
-          </a:bodyPr>
-          <a:lstStyle/>
-          <a:p>
-            <a:pPr algn="l"/>
-            <a:r>
-              <a:rPr sz="3400" b="0" i="0">
-                <a:solidFill>
-                  <a:srgbClr val="0A2240"/>
-                </a:solidFill>
-                <a:latin typeface="Arial"/>
-              </a:rPr>
-              <a:t>60% faster rollout; 50% fewer tickets.</a:t>
+              <a:t>60% faster; 50% fewer tickets</a:t>
             </a:r>
           </a:p>
         </p:txBody>
@@ -3635,405 +3635,6 @@
 </file>
 
 <file path=ppt/slideLayouts/slideLayout18.xml><?xml version="1.0" encoding="utf-8"?>
-<p:sldLayout xmlns:a="http://schemas.openxmlformats.org/drawingml/2006/main" xmlns:r="http://schemas.openxmlformats.org/officeDocument/2006/relationships" xmlns:p="http://schemas.openxmlformats.org/presentationml/2006/main" type="blank" preserve="1">
-  <p:cSld name="slidekit · Card Grid">
-    <p:bg>
-      <p:bgPr>
-        <a:solidFill>
-          <a:srgbClr val="FFFFFF"/>
-        </a:solidFill>
-        <a:effectLst/>
-      </p:bgPr>
-    </p:bg>
-    <p:spTree>
-      <p:nvGrpSpPr>
-        <p:cNvPr id="1" name=""/>
-        <p:cNvGrpSpPr/>
-        <p:nvPr/>
-      </p:nvGrpSpPr>
-      <p:grpSpPr>
-        <a:xfrm>
-          <a:off x="0" y="0"/>
-          <a:ext cx="0" cy="0"/>
-          <a:chOff x="0" y="0"/>
-          <a:chExt cx="0" cy="0"/>
-        </a:xfrm>
-      </p:grpSpPr>
-      <p:sp>
-        <p:nvSpPr>
-          <p:cNvPr id="4" name="Slide Number Placeholder 3"/>
-          <p:cNvSpPr>
-            <a:spLocks noGrp="1"/>
-          </p:cNvSpPr>
-          <p:nvPr>
-            <p:ph type="sldNum" sz="quarter" idx="12"/>
-          </p:nvPr>
-        </p:nvSpPr>
-        <p:spPr>
-          <a:xfrm>
-            <a:off x="11186160" y="6035040"/>
-            <a:ext cx="548640" cy="365760"/>
-          </a:xfrm>
-        </p:spPr>
-        <p:txBody>
-          <a:bodyPr/>
-          <a:lstStyle/>
-          <a:p>
-            <a:fld id="{C1FF6DA9-008F-8B48-92A6-B652298478BF}" type="slidenum">
-              <a:rPr lang="en-US" smtClean="0"/>
-              <a:t>‹#›</a:t>
-            </a:fld>
-            <a:endParaRPr lang="en-US"/>
-          </a:p>
-        </p:txBody>
-      </p:sp>
-      <p:sp>
-        <p:nvSpPr>
-          <p:cNvPr id="5" name="TextBox 4"/>
-          <p:cNvSpPr/>
-          <p:nvPr>
-            <p:ph type="title"/>
-          </p:nvPr>
-        </p:nvSpPr>
-        <p:spPr>
-          <a:xfrm>
-            <a:off x="457200" y="457200"/>
-            <a:ext cx="11277600" cy="768096"/>
-          </a:xfrm>
-          <a:prstGeom prst="rect">
-            <a:avLst/>
-          </a:prstGeom>
-          <a:noFill/>
-        </p:spPr>
-        <p:txBody>
-          <a:bodyPr wrap="none" lIns="0" rIns="0">
-            <a:noAutofit/>
-          </a:bodyPr>
-          <a:lstStyle/>
-          <a:p>
-            <a:pPr algn="l"/>
-            <a:r>
-              <a:rPr sz="4200" b="1" i="0">
-                <a:solidFill>
-                  <a:srgbClr val="0072CE"/>
-                </a:solidFill>
-                <a:latin typeface="Arial"/>
-              </a:rPr>
-              <a:t>What We Offer</a:t>
-            </a:r>
-          </a:p>
-        </p:txBody>
-      </p:sp>
-      <p:sp>
-        <p:nvSpPr>
-          <p:cNvPr id="6" name="TextBox 5"/>
-          <p:cNvSpPr/>
-          <p:nvPr>
-            <p:ph type="body" idx="1"/>
-          </p:nvPr>
-        </p:nvSpPr>
-        <p:spPr>
-          <a:xfrm>
-            <a:off x="457200" y="1499616"/>
-            <a:ext cx="2831366" cy="518159"/>
-          </a:xfrm>
-          <a:prstGeom prst="rect">
-            <a:avLst/>
-          </a:prstGeom>
-          <a:noFill/>
-        </p:spPr>
-        <p:txBody>
-          <a:bodyPr wrap="none" lIns="0" rIns="0">
-            <a:noAutofit/>
-          </a:bodyPr>
-          <a:lstStyle/>
-          <a:p>
-            <a:pPr algn="l"/>
-            <a:r>
-              <a:rPr sz="3400" b="1" i="0">
-                <a:solidFill>
-                  <a:srgbClr val="0A2240"/>
-                </a:solidFill>
-                <a:latin typeface="Arial"/>
-              </a:rPr>
-              <a:t>Insights</a:t>
-            </a:r>
-          </a:p>
-        </p:txBody>
-      </p:sp>
-      <p:sp>
-        <p:nvSpPr>
-          <p:cNvPr id="7" name="TextBox 6"/>
-          <p:cNvSpPr/>
-          <p:nvPr>
-            <p:ph type="body" idx="2"/>
-          </p:nvPr>
-        </p:nvSpPr>
-        <p:spPr>
-          <a:xfrm>
-            <a:off x="457200" y="2154935"/>
-            <a:ext cx="2613660" cy="3605785"/>
-          </a:xfrm>
-          <a:prstGeom prst="rect">
-            <a:avLst/>
-          </a:prstGeom>
-          <a:noFill/>
-        </p:spPr>
-        <p:txBody>
-          <a:bodyPr wrap="square" lIns="0" rIns="0">
-            <a:noAutofit/>
-          </a:bodyPr>
-          <a:lstStyle/>
-          <a:p>
-            <a:pPr algn="l"/>
-            <a:r>
-              <a:rPr sz="3400" b="0" i="0">
-                <a:solidFill>
-                  <a:srgbClr val="0A2240"/>
-                </a:solidFill>
-                <a:latin typeface="Arial"/>
-              </a:rPr>
-              <a:t>Live data and AI analytics.</a:t>
-            </a:r>
-          </a:p>
-        </p:txBody>
-      </p:sp>
-      <p:sp>
-        <p:nvSpPr>
-          <p:cNvPr id="8" name="TextBox 7"/>
-          <p:cNvSpPr/>
-          <p:nvPr>
-            <p:ph type="body" idx="3"/>
-          </p:nvPr>
-        </p:nvSpPr>
-        <p:spPr>
-          <a:xfrm>
-            <a:off x="3345180" y="1499616"/>
-            <a:ext cx="2909292" cy="518159"/>
-          </a:xfrm>
-          <a:prstGeom prst="rect">
-            <a:avLst/>
-          </a:prstGeom>
-          <a:noFill/>
-        </p:spPr>
-        <p:txBody>
-          <a:bodyPr wrap="none" lIns="0" rIns="0">
-            <a:noAutofit/>
-          </a:bodyPr>
-          <a:lstStyle/>
-          <a:p>
-            <a:pPr algn="l"/>
-            <a:r>
-              <a:rPr sz="3400" b="1" i="0">
-                <a:solidFill>
-                  <a:srgbClr val="0A2240"/>
-                </a:solidFill>
-                <a:latin typeface="Arial"/>
-              </a:rPr>
-              <a:t>Security</a:t>
-            </a:r>
-          </a:p>
-        </p:txBody>
-      </p:sp>
-      <p:sp>
-        <p:nvSpPr>
-          <p:cNvPr id="9" name="TextBox 8"/>
-          <p:cNvSpPr/>
-          <p:nvPr>
-            <p:ph type="body" idx="4"/>
-          </p:nvPr>
-        </p:nvSpPr>
-        <p:spPr>
-          <a:xfrm>
-            <a:off x="3345180" y="2154935"/>
-            <a:ext cx="2613660" cy="3605785"/>
-          </a:xfrm>
-          <a:prstGeom prst="rect">
-            <a:avLst/>
-          </a:prstGeom>
-          <a:noFill/>
-        </p:spPr>
-        <p:txBody>
-          <a:bodyPr wrap="square" lIns="0" rIns="0">
-            <a:noAutofit/>
-          </a:bodyPr>
-          <a:lstStyle/>
-          <a:p>
-            <a:pPr algn="l"/>
-            <a:r>
-              <a:rPr sz="3400" b="0" i="0">
-                <a:solidFill>
-                  <a:srgbClr val="0A2240"/>
-                </a:solidFill>
-                <a:latin typeface="Arial"/>
-              </a:rPr>
-              <a:t>Zero-trust, SOC 2 ready.</a:t>
-            </a:r>
-          </a:p>
-        </p:txBody>
-      </p:sp>
-      <p:sp>
-        <p:nvSpPr>
-          <p:cNvPr id="10" name="TextBox 9"/>
-          <p:cNvSpPr/>
-          <p:nvPr>
-            <p:ph type="body" idx="5"/>
-          </p:nvPr>
-        </p:nvSpPr>
-        <p:spPr>
-          <a:xfrm>
-            <a:off x="6233160" y="1499616"/>
-            <a:ext cx="2613660" cy="518159"/>
-          </a:xfrm>
-          <a:prstGeom prst="rect">
-            <a:avLst/>
-          </a:prstGeom>
-          <a:noFill/>
-        </p:spPr>
-        <p:txBody>
-          <a:bodyPr wrap="none" lIns="0" rIns="0">
-            <a:noAutofit/>
-          </a:bodyPr>
-          <a:lstStyle/>
-          <a:p>
-            <a:pPr algn="l"/>
-            <a:r>
-              <a:rPr sz="3400" b="1" i="0">
-                <a:solidFill>
-                  <a:srgbClr val="0A2240"/>
-                </a:solidFill>
-                <a:latin typeface="Arial"/>
-              </a:rPr>
-              <a:t>Speed</a:t>
-            </a:r>
-          </a:p>
-        </p:txBody>
-      </p:sp>
-      <p:sp>
-        <p:nvSpPr>
-          <p:cNvPr id="11" name="TextBox 10"/>
-          <p:cNvSpPr/>
-          <p:nvPr>
-            <p:ph type="body" idx="6"/>
-          </p:nvPr>
-        </p:nvSpPr>
-        <p:spPr>
-          <a:xfrm>
-            <a:off x="6233160" y="2154935"/>
-            <a:ext cx="2613660" cy="3605785"/>
-          </a:xfrm>
-          <a:prstGeom prst="rect">
-            <a:avLst/>
-          </a:prstGeom>
-          <a:noFill/>
-        </p:spPr>
-        <p:txBody>
-          <a:bodyPr wrap="square" lIns="0" rIns="0">
-            <a:noAutofit/>
-          </a:bodyPr>
-          <a:lstStyle/>
-          <a:p>
-            <a:pPr algn="l"/>
-            <a:r>
-              <a:rPr sz="3400" b="0" i="0">
-                <a:solidFill>
-                  <a:srgbClr val="0A2240"/>
-                </a:solidFill>
-                <a:latin typeface="Arial"/>
-              </a:rPr>
-              <a:t>Sub-100ms p99 latency.</a:t>
-            </a:r>
-          </a:p>
-        </p:txBody>
-      </p:sp>
-      <p:sp>
-        <p:nvSpPr>
-          <p:cNvPr id="12" name="TextBox 11"/>
-          <p:cNvSpPr/>
-          <p:nvPr>
-            <p:ph type="body" idx="7"/>
-          </p:nvPr>
-        </p:nvSpPr>
-        <p:spPr>
-          <a:xfrm>
-            <a:off x="9121140" y="1499616"/>
-            <a:ext cx="2613660" cy="518159"/>
-          </a:xfrm>
-          <a:prstGeom prst="rect">
-            <a:avLst/>
-          </a:prstGeom>
-          <a:noFill/>
-        </p:spPr>
-        <p:txBody>
-          <a:bodyPr wrap="none" lIns="0" rIns="0">
-            <a:noAutofit/>
-          </a:bodyPr>
-          <a:lstStyle/>
-          <a:p>
-            <a:pPr algn="l"/>
-            <a:r>
-              <a:rPr sz="3400" b="1" i="0">
-                <a:solidFill>
-                  <a:srgbClr val="0A2240"/>
-                </a:solidFill>
-                <a:latin typeface="Arial"/>
-              </a:rPr>
-              <a:t>APIs</a:t>
-            </a:r>
-          </a:p>
-        </p:txBody>
-      </p:sp>
-      <p:sp>
-        <p:nvSpPr>
-          <p:cNvPr id="13" name="TextBox 12"/>
-          <p:cNvSpPr/>
-          <p:nvPr>
-            <p:ph type="body" idx="8"/>
-          </p:nvPr>
-        </p:nvSpPr>
-        <p:spPr>
-          <a:xfrm>
-            <a:off x="9121140" y="2154935"/>
-            <a:ext cx="2613660" cy="3605785"/>
-          </a:xfrm>
-          <a:prstGeom prst="rect">
-            <a:avLst/>
-          </a:prstGeom>
-          <a:noFill/>
-        </p:spPr>
-        <p:txBody>
-          <a:bodyPr wrap="square" lIns="0" rIns="0">
-            <a:noAutofit/>
-          </a:bodyPr>
-          <a:lstStyle/>
-          <a:p>
-            <a:pPr algn="l"/>
-            <a:r>
-              <a:rPr sz="3400" b="0" i="0">
-                <a:solidFill>
-                  <a:srgbClr val="0A2240"/>
-                </a:solidFill>
-                <a:latin typeface="Arial"/>
-              </a:rPr>
-              <a:t>300+ open connectors.</a:t>
-            </a:r>
-          </a:p>
-        </p:txBody>
-      </p:sp>
-    </p:spTree>
-    <p:extLst>
-      <p:ext uri="{BB962C8B-B14F-4D97-AF65-F5344CB8AC3E}">
-        <p14:creationId xmlns:p14="http://schemas.microsoft.com/office/powerpoint/2010/main" val="1212999818"/>
-      </p:ext>
-    </p:extLst>
-  </p:cSld>
-  <p:clrMapOvr>
-    <a:masterClrMapping/>
-  </p:clrMapOvr>
-</p:sldLayout>
-</file>
-
-<file path=ppt/slideLayouts/slideLayout19.xml><?xml version="1.0" encoding="utf-8"?>
 <p:sldLayout xmlns:a="http://schemas.openxmlformats.org/drawingml/2006/main" xmlns:r="http://schemas.openxmlformats.org/officeDocument/2006/relationships" xmlns:p="http://schemas.openxmlformats.org/presentationml/2006/main" type="blank" preserve="1">
   <p:cSld name="slidekit · Section Divider">
     <p:bg>
@@ -4188,6 +3789,511 @@
                 <a:latin typeface="Arial"/>
               </a:rPr>
               <a:t>Where We Stand Today</a:t>
+            </a:r>
+          </a:p>
+        </p:txBody>
+      </p:sp>
+    </p:spTree>
+    <p:extLst>
+      <p:ext uri="{BB962C8B-B14F-4D97-AF65-F5344CB8AC3E}">
+        <p14:creationId xmlns:p14="http://schemas.microsoft.com/office/powerpoint/2010/main" val="1212999818"/>
+      </p:ext>
+    </p:extLst>
+  </p:cSld>
+  <p:clrMapOvr>
+    <a:masterClrMapping/>
+  </p:clrMapOvr>
+</p:sldLayout>
+</file>
+
+<file path=ppt/slideLayouts/slideLayout19.xml><?xml version="1.0" encoding="utf-8"?>
+<p:sldLayout xmlns:a="http://schemas.openxmlformats.org/drawingml/2006/main" xmlns:r="http://schemas.openxmlformats.org/officeDocument/2006/relationships" xmlns:p="http://schemas.openxmlformats.org/presentationml/2006/main" type="blank" preserve="1">
+  <p:cSld name="slidekit · Agenda">
+    <p:bg>
+      <p:bgPr>
+        <a:solidFill>
+          <a:srgbClr val="FFFFFF"/>
+        </a:solidFill>
+        <a:effectLst/>
+      </p:bgPr>
+    </p:bg>
+    <p:spTree>
+      <p:nvGrpSpPr>
+        <p:cNvPr id="1" name=""/>
+        <p:cNvGrpSpPr/>
+        <p:nvPr/>
+      </p:nvGrpSpPr>
+      <p:grpSpPr>
+        <a:xfrm>
+          <a:off x="0" y="0"/>
+          <a:ext cx="0" cy="0"/>
+          <a:chOff x="0" y="0"/>
+          <a:chExt cx="0" cy="0"/>
+        </a:xfrm>
+      </p:grpSpPr>
+      <p:sp>
+        <p:nvSpPr>
+          <p:cNvPr id="4" name="Slide Number Placeholder 3"/>
+          <p:cNvSpPr>
+            <a:spLocks noGrp="1"/>
+          </p:cNvSpPr>
+          <p:nvPr>
+            <p:ph type="sldNum" sz="quarter" idx="12"/>
+          </p:nvPr>
+        </p:nvSpPr>
+        <p:spPr>
+          <a:xfrm>
+            <a:off x="11186160" y="6035040"/>
+            <a:ext cx="548640" cy="365760"/>
+          </a:xfrm>
+        </p:spPr>
+        <p:txBody>
+          <a:bodyPr/>
+          <a:lstStyle/>
+          <a:p>
+            <a:fld id="{C1FF6DA9-008F-8B48-92A6-B652298478BF}" type="slidenum">
+              <a:rPr lang="en-US" smtClean="0"/>
+              <a:t>‹#›</a:t>
+            </a:fld>
+            <a:endParaRPr lang="en-US"/>
+          </a:p>
+        </p:txBody>
+      </p:sp>
+      <p:sp>
+        <p:nvSpPr>
+          <p:cNvPr id="5" name="TextBox 4"/>
+          <p:cNvSpPr/>
+          <p:nvPr>
+            <p:ph type="title"/>
+          </p:nvPr>
+        </p:nvSpPr>
+        <p:spPr>
+          <a:xfrm>
+            <a:off x="457200" y="457200"/>
+            <a:ext cx="11277600" cy="768096"/>
+          </a:xfrm>
+          <a:prstGeom prst="rect">
+            <a:avLst/>
+          </a:prstGeom>
+          <a:noFill/>
+        </p:spPr>
+        <p:txBody>
+          <a:bodyPr wrap="none" lIns="0" rIns="0">
+            <a:noAutofit/>
+          </a:bodyPr>
+          <a:lstStyle/>
+          <a:p>
+            <a:pPr algn="l"/>
+            <a:r>
+              <a:rPr sz="4200" b="1" i="0">
+                <a:solidFill>
+                  <a:srgbClr val="0072CE"/>
+                </a:solidFill>
+                <a:latin typeface="Arial"/>
+              </a:rPr>
+              <a:t>What We Will Cover</a:t>
+            </a:r>
+          </a:p>
+        </p:txBody>
+      </p:sp>
+      <p:sp>
+        <p:nvSpPr>
+          <p:cNvPr id="6" name="Rectangle 5"/>
+          <p:cNvSpPr/>
+          <p:nvPr>
+            <p:ph type="body" idx="1"/>
+          </p:nvPr>
+        </p:nvSpPr>
+        <p:spPr>
+          <a:xfrm>
+            <a:off x="457200" y="1280160"/>
+            <a:ext cx="11277600" cy="64008"/>
+          </a:xfrm>
+          <a:prstGeom prst="rect">
+            <a:avLst/>
+          </a:prstGeom>
+          <a:solidFill>
+            <a:srgbClr val="0072CE"/>
+          </a:solidFill>
+          <a:ln>
+            <a:noFill/>
+          </a:ln>
+          <a:effectLst/>
+        </p:spPr>
+        <p:txBody>
+          <a:bodyPr rtlCol="0" anchor="ctr"/>
+          <a:lstStyle/>
+          <a:p>
+            <a:pPr algn="ctr"/>
+          </a:p>
+        </p:txBody>
+      </p:sp>
+      <p:sp>
+        <p:nvSpPr>
+          <p:cNvPr id="7" name="TextBox 6"/>
+          <p:cNvSpPr/>
+          <p:nvPr>
+            <p:ph type="body" idx="2"/>
+          </p:nvPr>
+        </p:nvSpPr>
+        <p:spPr>
+          <a:xfrm>
+            <a:off x="457200" y="1618488"/>
+            <a:ext cx="951348" cy="518159"/>
+          </a:xfrm>
+          <a:prstGeom prst="rect">
+            <a:avLst/>
+          </a:prstGeom>
+          <a:noFill/>
+        </p:spPr>
+        <p:txBody>
+          <a:bodyPr wrap="none" lIns="0" rIns="0">
+            <a:noAutofit/>
+          </a:bodyPr>
+          <a:lstStyle/>
+          <a:p>
+            <a:pPr algn="l"/>
+            <a:r>
+              <a:rPr sz="3400" b="1" i="0">
+                <a:solidFill>
+                  <a:srgbClr val="0072CE"/>
+                </a:solidFill>
+                <a:latin typeface="Arial"/>
+              </a:rPr>
+              <a:t>01</a:t>
+            </a:r>
+          </a:p>
+        </p:txBody>
+      </p:sp>
+      <p:sp>
+        <p:nvSpPr>
+          <p:cNvPr id="8" name="TextBox 7"/>
+          <p:cNvSpPr/>
+          <p:nvPr>
+            <p:ph type="body" idx="3"/>
+          </p:nvPr>
+        </p:nvSpPr>
+        <p:spPr>
+          <a:xfrm>
+            <a:off x="1371600" y="1618488"/>
+            <a:ext cx="10363200" cy="518159"/>
+          </a:xfrm>
+          <a:prstGeom prst="rect">
+            <a:avLst/>
+          </a:prstGeom>
+          <a:noFill/>
+        </p:spPr>
+        <p:txBody>
+          <a:bodyPr wrap="none" lIns="0" rIns="0">
+            <a:noAutofit/>
+          </a:bodyPr>
+          <a:lstStyle/>
+          <a:p>
+            <a:pPr algn="l"/>
+            <a:r>
+              <a:rPr sz="3400" b="0" i="0">
+                <a:solidFill>
+                  <a:srgbClr val="0A2240"/>
+                </a:solidFill>
+                <a:latin typeface="Arial"/>
+              </a:rPr>
+              <a:t>Performance against targets</a:t>
+            </a:r>
+          </a:p>
+        </p:txBody>
+      </p:sp>
+      <p:sp>
+        <p:nvSpPr>
+          <p:cNvPr id="9" name="TextBox 8"/>
+          <p:cNvSpPr/>
+          <p:nvPr>
+            <p:ph type="body" idx="4"/>
+          </p:nvPr>
+        </p:nvSpPr>
+        <p:spPr>
+          <a:xfrm>
+            <a:off x="457200" y="2501798"/>
+            <a:ext cx="951348" cy="518159"/>
+          </a:xfrm>
+          <a:prstGeom prst="rect">
+            <a:avLst/>
+          </a:prstGeom>
+          <a:noFill/>
+        </p:spPr>
+        <p:txBody>
+          <a:bodyPr wrap="none" lIns="0" rIns="0">
+            <a:noAutofit/>
+          </a:bodyPr>
+          <a:lstStyle/>
+          <a:p>
+            <a:pPr algn="l"/>
+            <a:r>
+              <a:rPr sz="3400" b="1" i="0">
+                <a:solidFill>
+                  <a:srgbClr val="0072CE"/>
+                </a:solidFill>
+                <a:latin typeface="Arial"/>
+              </a:rPr>
+              <a:t>02</a:t>
+            </a:r>
+          </a:p>
+        </p:txBody>
+      </p:sp>
+      <p:sp>
+        <p:nvSpPr>
+          <p:cNvPr id="10" name="TextBox 9"/>
+          <p:cNvSpPr/>
+          <p:nvPr>
+            <p:ph type="body" idx="5"/>
+          </p:nvPr>
+        </p:nvSpPr>
+        <p:spPr>
+          <a:xfrm>
+            <a:off x="1371600" y="2501798"/>
+            <a:ext cx="10363200" cy="518159"/>
+          </a:xfrm>
+          <a:prstGeom prst="rect">
+            <a:avLst/>
+          </a:prstGeom>
+          <a:noFill/>
+        </p:spPr>
+        <p:txBody>
+          <a:bodyPr wrap="none" lIns="0" rIns="0">
+            <a:noAutofit/>
+          </a:bodyPr>
+          <a:lstStyle/>
+          <a:p>
+            <a:pPr algn="l"/>
+            <a:r>
+              <a:rPr sz="3400" b="0" i="0">
+                <a:solidFill>
+                  <a:srgbClr val="0A2240"/>
+                </a:solidFill>
+                <a:latin typeface="Arial"/>
+              </a:rPr>
+              <a:t>Customer and market signals</a:t>
+            </a:r>
+          </a:p>
+        </p:txBody>
+      </p:sp>
+      <p:sp>
+        <p:nvSpPr>
+          <p:cNvPr id="11" name="TextBox 10"/>
+          <p:cNvSpPr/>
+          <p:nvPr>
+            <p:ph type="body" idx="6"/>
+          </p:nvPr>
+        </p:nvSpPr>
+        <p:spPr>
+          <a:xfrm>
+            <a:off x="457200" y="3385108"/>
+            <a:ext cx="951348" cy="518159"/>
+          </a:xfrm>
+          <a:prstGeom prst="rect">
+            <a:avLst/>
+          </a:prstGeom>
+          <a:noFill/>
+        </p:spPr>
+        <p:txBody>
+          <a:bodyPr wrap="none" lIns="0" rIns="0">
+            <a:noAutofit/>
+          </a:bodyPr>
+          <a:lstStyle/>
+          <a:p>
+            <a:pPr algn="l"/>
+            <a:r>
+              <a:rPr sz="3400" b="1" i="0">
+                <a:solidFill>
+                  <a:srgbClr val="0072CE"/>
+                </a:solidFill>
+                <a:latin typeface="Arial"/>
+              </a:rPr>
+              <a:t>03</a:t>
+            </a:r>
+          </a:p>
+        </p:txBody>
+      </p:sp>
+      <p:sp>
+        <p:nvSpPr>
+          <p:cNvPr id="12" name="TextBox 11"/>
+          <p:cNvSpPr/>
+          <p:nvPr>
+            <p:ph type="body" idx="7"/>
+          </p:nvPr>
+        </p:nvSpPr>
+        <p:spPr>
+          <a:xfrm>
+            <a:off x="1371600" y="3385108"/>
+            <a:ext cx="10363200" cy="518159"/>
+          </a:xfrm>
+          <a:prstGeom prst="rect">
+            <a:avLst/>
+          </a:prstGeom>
+          <a:noFill/>
+        </p:spPr>
+        <p:txBody>
+          <a:bodyPr wrap="none" lIns="0" rIns="0">
+            <a:noAutofit/>
+          </a:bodyPr>
+          <a:lstStyle/>
+          <a:p>
+            <a:pPr algn="l"/>
+            <a:r>
+              <a:rPr sz="3400" b="0" i="0">
+                <a:solidFill>
+                  <a:srgbClr val="0A2240"/>
+                </a:solidFill>
+                <a:latin typeface="Arial"/>
+              </a:rPr>
+              <a:t>Operational health and risks</a:t>
+            </a:r>
+          </a:p>
+        </p:txBody>
+      </p:sp>
+      <p:sp>
+        <p:nvSpPr>
+          <p:cNvPr id="13" name="TextBox 12"/>
+          <p:cNvSpPr/>
+          <p:nvPr>
+            <p:ph type="body" idx="8"/>
+          </p:nvPr>
+        </p:nvSpPr>
+        <p:spPr>
+          <a:xfrm>
+            <a:off x="457200" y="4268418"/>
+            <a:ext cx="951348" cy="518159"/>
+          </a:xfrm>
+          <a:prstGeom prst="rect">
+            <a:avLst/>
+          </a:prstGeom>
+          <a:noFill/>
+        </p:spPr>
+        <p:txBody>
+          <a:bodyPr wrap="none" lIns="0" rIns="0">
+            <a:noAutofit/>
+          </a:bodyPr>
+          <a:lstStyle/>
+          <a:p>
+            <a:pPr algn="l"/>
+            <a:r>
+              <a:rPr sz="3400" b="1" i="0">
+                <a:solidFill>
+                  <a:srgbClr val="0072CE"/>
+                </a:solidFill>
+                <a:latin typeface="Arial"/>
+              </a:rPr>
+              <a:t>04</a:t>
+            </a:r>
+          </a:p>
+        </p:txBody>
+      </p:sp>
+      <p:sp>
+        <p:nvSpPr>
+          <p:cNvPr id="14" name="TextBox 13"/>
+          <p:cNvSpPr/>
+          <p:nvPr>
+            <p:ph type="body" idx="9"/>
+          </p:nvPr>
+        </p:nvSpPr>
+        <p:spPr>
+          <a:xfrm>
+            <a:off x="1371600" y="4268418"/>
+            <a:ext cx="10363200" cy="518159"/>
+          </a:xfrm>
+          <a:prstGeom prst="rect">
+            <a:avLst/>
+          </a:prstGeom>
+          <a:noFill/>
+        </p:spPr>
+        <p:txBody>
+          <a:bodyPr wrap="none" lIns="0" rIns="0">
+            <a:noAutofit/>
+          </a:bodyPr>
+          <a:lstStyle/>
+          <a:p>
+            <a:pPr algn="l"/>
+            <a:r>
+              <a:rPr sz="3400" b="0" i="0">
+                <a:solidFill>
+                  <a:srgbClr val="0A2240"/>
+                </a:solidFill>
+                <a:latin typeface="Arial"/>
+              </a:rPr>
+              <a:t>Roadmap for next quarter</a:t>
+            </a:r>
+          </a:p>
+        </p:txBody>
+      </p:sp>
+      <p:sp>
+        <p:nvSpPr>
+          <p:cNvPr id="15" name="TextBox 14"/>
+          <p:cNvSpPr/>
+          <p:nvPr>
+            <p:ph type="body" idx="13"/>
+          </p:nvPr>
+        </p:nvSpPr>
+        <p:spPr>
+          <a:xfrm>
+            <a:off x="457200" y="5151728"/>
+            <a:ext cx="951348" cy="518159"/>
+          </a:xfrm>
+          <a:prstGeom prst="rect">
+            <a:avLst/>
+          </a:prstGeom>
+          <a:noFill/>
+        </p:spPr>
+        <p:txBody>
+          <a:bodyPr wrap="none" lIns="0" rIns="0">
+            <a:noAutofit/>
+          </a:bodyPr>
+          <a:lstStyle/>
+          <a:p>
+            <a:pPr algn="l"/>
+            <a:r>
+              <a:rPr sz="3400" b="1" i="0">
+                <a:solidFill>
+                  <a:srgbClr val="0072CE"/>
+                </a:solidFill>
+                <a:latin typeface="Arial"/>
+              </a:rPr>
+              <a:t>05</a:t>
+            </a:r>
+          </a:p>
+        </p:txBody>
+      </p:sp>
+      <p:sp>
+        <p:nvSpPr>
+          <p:cNvPr id="16" name="TextBox 15"/>
+          <p:cNvSpPr/>
+          <p:nvPr>
+            <p:ph type="body" idx="14"/>
+          </p:nvPr>
+        </p:nvSpPr>
+        <p:spPr>
+          <a:xfrm>
+            <a:off x="1371600" y="5151728"/>
+            <a:ext cx="10363200" cy="518159"/>
+          </a:xfrm>
+          <a:prstGeom prst="rect">
+            <a:avLst/>
+          </a:prstGeom>
+          <a:noFill/>
+        </p:spPr>
+        <p:txBody>
+          <a:bodyPr wrap="none" lIns="0" rIns="0">
+            <a:noAutofit/>
+          </a:bodyPr>
+          <a:lstStyle/>
+          <a:p>
+            <a:pPr algn="l"/>
+            <a:r>
+              <a:rPr sz="3400" b="0" i="0">
+                <a:solidFill>
+                  <a:srgbClr val="0A2240"/>
+                </a:solidFill>
+                <a:latin typeface="Arial"/>
+              </a:rPr>
+              <a:t>Decisions we need today</a:t>
             </a:r>
           </a:p>
         </p:txBody>
@@ -4377,511 +4483,6 @@
 
 <file path=ppt/slideLayouts/slideLayout20.xml><?xml version="1.0" encoding="utf-8"?>
 <p:sldLayout xmlns:a="http://schemas.openxmlformats.org/drawingml/2006/main" xmlns:r="http://schemas.openxmlformats.org/officeDocument/2006/relationships" xmlns:p="http://schemas.openxmlformats.org/presentationml/2006/main" type="blank" preserve="1">
-  <p:cSld name="slidekit · Agenda">
-    <p:bg>
-      <p:bgPr>
-        <a:solidFill>
-          <a:srgbClr val="FFFFFF"/>
-        </a:solidFill>
-        <a:effectLst/>
-      </p:bgPr>
-    </p:bg>
-    <p:spTree>
-      <p:nvGrpSpPr>
-        <p:cNvPr id="1" name=""/>
-        <p:cNvGrpSpPr/>
-        <p:nvPr/>
-      </p:nvGrpSpPr>
-      <p:grpSpPr>
-        <a:xfrm>
-          <a:off x="0" y="0"/>
-          <a:ext cx="0" cy="0"/>
-          <a:chOff x="0" y="0"/>
-          <a:chExt cx="0" cy="0"/>
-        </a:xfrm>
-      </p:grpSpPr>
-      <p:sp>
-        <p:nvSpPr>
-          <p:cNvPr id="4" name="Slide Number Placeholder 3"/>
-          <p:cNvSpPr>
-            <a:spLocks noGrp="1"/>
-          </p:cNvSpPr>
-          <p:nvPr>
-            <p:ph type="sldNum" sz="quarter" idx="12"/>
-          </p:nvPr>
-        </p:nvSpPr>
-        <p:spPr>
-          <a:xfrm>
-            <a:off x="11186160" y="6035040"/>
-            <a:ext cx="548640" cy="365760"/>
-          </a:xfrm>
-        </p:spPr>
-        <p:txBody>
-          <a:bodyPr/>
-          <a:lstStyle/>
-          <a:p>
-            <a:fld id="{C1FF6DA9-008F-8B48-92A6-B652298478BF}" type="slidenum">
-              <a:rPr lang="en-US" smtClean="0"/>
-              <a:t>‹#›</a:t>
-            </a:fld>
-            <a:endParaRPr lang="en-US"/>
-          </a:p>
-        </p:txBody>
-      </p:sp>
-      <p:sp>
-        <p:nvSpPr>
-          <p:cNvPr id="5" name="TextBox 4"/>
-          <p:cNvSpPr/>
-          <p:nvPr>
-            <p:ph type="title"/>
-          </p:nvPr>
-        </p:nvSpPr>
-        <p:spPr>
-          <a:xfrm>
-            <a:off x="457200" y="457200"/>
-            <a:ext cx="11277600" cy="768096"/>
-          </a:xfrm>
-          <a:prstGeom prst="rect">
-            <a:avLst/>
-          </a:prstGeom>
-          <a:noFill/>
-        </p:spPr>
-        <p:txBody>
-          <a:bodyPr wrap="none" lIns="0" rIns="0">
-            <a:noAutofit/>
-          </a:bodyPr>
-          <a:lstStyle/>
-          <a:p>
-            <a:pPr algn="l"/>
-            <a:r>
-              <a:rPr sz="4200" b="1" i="0">
-                <a:solidFill>
-                  <a:srgbClr val="0072CE"/>
-                </a:solidFill>
-                <a:latin typeface="Arial"/>
-              </a:rPr>
-              <a:t>What We Will Cover</a:t>
-            </a:r>
-          </a:p>
-        </p:txBody>
-      </p:sp>
-      <p:sp>
-        <p:nvSpPr>
-          <p:cNvPr id="6" name="Rectangle 5"/>
-          <p:cNvSpPr/>
-          <p:nvPr>
-            <p:ph type="body" idx="1"/>
-          </p:nvPr>
-        </p:nvSpPr>
-        <p:spPr>
-          <a:xfrm>
-            <a:off x="457200" y="1280160"/>
-            <a:ext cx="11277600" cy="64008"/>
-          </a:xfrm>
-          <a:prstGeom prst="rect">
-            <a:avLst/>
-          </a:prstGeom>
-          <a:solidFill>
-            <a:srgbClr val="0072CE"/>
-          </a:solidFill>
-          <a:ln>
-            <a:noFill/>
-          </a:ln>
-          <a:effectLst/>
-        </p:spPr>
-        <p:txBody>
-          <a:bodyPr rtlCol="0" anchor="ctr"/>
-          <a:lstStyle/>
-          <a:p>
-            <a:pPr algn="ctr"/>
-          </a:p>
-        </p:txBody>
-      </p:sp>
-      <p:sp>
-        <p:nvSpPr>
-          <p:cNvPr id="7" name="TextBox 6"/>
-          <p:cNvSpPr/>
-          <p:nvPr>
-            <p:ph type="body" idx="2"/>
-          </p:nvPr>
-        </p:nvSpPr>
-        <p:spPr>
-          <a:xfrm>
-            <a:off x="457200" y="1618488"/>
-            <a:ext cx="951348" cy="518159"/>
-          </a:xfrm>
-          <a:prstGeom prst="rect">
-            <a:avLst/>
-          </a:prstGeom>
-          <a:noFill/>
-        </p:spPr>
-        <p:txBody>
-          <a:bodyPr wrap="none" lIns="0" rIns="0">
-            <a:noAutofit/>
-          </a:bodyPr>
-          <a:lstStyle/>
-          <a:p>
-            <a:pPr algn="l"/>
-            <a:r>
-              <a:rPr sz="3400" b="1" i="0">
-                <a:solidFill>
-                  <a:srgbClr val="0072CE"/>
-                </a:solidFill>
-                <a:latin typeface="Arial"/>
-              </a:rPr>
-              <a:t>01</a:t>
-            </a:r>
-          </a:p>
-        </p:txBody>
-      </p:sp>
-      <p:sp>
-        <p:nvSpPr>
-          <p:cNvPr id="8" name="TextBox 7"/>
-          <p:cNvSpPr/>
-          <p:nvPr>
-            <p:ph type="body" idx="3"/>
-          </p:nvPr>
-        </p:nvSpPr>
-        <p:spPr>
-          <a:xfrm>
-            <a:off x="1371600" y="1618488"/>
-            <a:ext cx="10363200" cy="518159"/>
-          </a:xfrm>
-          <a:prstGeom prst="rect">
-            <a:avLst/>
-          </a:prstGeom>
-          <a:noFill/>
-        </p:spPr>
-        <p:txBody>
-          <a:bodyPr wrap="none" lIns="0" rIns="0">
-            <a:noAutofit/>
-          </a:bodyPr>
-          <a:lstStyle/>
-          <a:p>
-            <a:pPr algn="l"/>
-            <a:r>
-              <a:rPr sz="3400" b="0" i="0">
-                <a:solidFill>
-                  <a:srgbClr val="0A2240"/>
-                </a:solidFill>
-                <a:latin typeface="Arial"/>
-              </a:rPr>
-              <a:t>Performance against targets</a:t>
-            </a:r>
-          </a:p>
-        </p:txBody>
-      </p:sp>
-      <p:sp>
-        <p:nvSpPr>
-          <p:cNvPr id="9" name="TextBox 8"/>
-          <p:cNvSpPr/>
-          <p:nvPr>
-            <p:ph type="body" idx="4"/>
-          </p:nvPr>
-        </p:nvSpPr>
-        <p:spPr>
-          <a:xfrm>
-            <a:off x="457200" y="2501798"/>
-            <a:ext cx="951348" cy="518159"/>
-          </a:xfrm>
-          <a:prstGeom prst="rect">
-            <a:avLst/>
-          </a:prstGeom>
-          <a:noFill/>
-        </p:spPr>
-        <p:txBody>
-          <a:bodyPr wrap="none" lIns="0" rIns="0">
-            <a:noAutofit/>
-          </a:bodyPr>
-          <a:lstStyle/>
-          <a:p>
-            <a:pPr algn="l"/>
-            <a:r>
-              <a:rPr sz="3400" b="1" i="0">
-                <a:solidFill>
-                  <a:srgbClr val="0072CE"/>
-                </a:solidFill>
-                <a:latin typeface="Arial"/>
-              </a:rPr>
-              <a:t>02</a:t>
-            </a:r>
-          </a:p>
-        </p:txBody>
-      </p:sp>
-      <p:sp>
-        <p:nvSpPr>
-          <p:cNvPr id="10" name="TextBox 9"/>
-          <p:cNvSpPr/>
-          <p:nvPr>
-            <p:ph type="body" idx="5"/>
-          </p:nvPr>
-        </p:nvSpPr>
-        <p:spPr>
-          <a:xfrm>
-            <a:off x="1371600" y="2501798"/>
-            <a:ext cx="10363200" cy="518159"/>
-          </a:xfrm>
-          <a:prstGeom prst="rect">
-            <a:avLst/>
-          </a:prstGeom>
-          <a:noFill/>
-        </p:spPr>
-        <p:txBody>
-          <a:bodyPr wrap="none" lIns="0" rIns="0">
-            <a:noAutofit/>
-          </a:bodyPr>
-          <a:lstStyle/>
-          <a:p>
-            <a:pPr algn="l"/>
-            <a:r>
-              <a:rPr sz="3400" b="0" i="0">
-                <a:solidFill>
-                  <a:srgbClr val="0A2240"/>
-                </a:solidFill>
-                <a:latin typeface="Arial"/>
-              </a:rPr>
-              <a:t>Customer and market signals</a:t>
-            </a:r>
-          </a:p>
-        </p:txBody>
-      </p:sp>
-      <p:sp>
-        <p:nvSpPr>
-          <p:cNvPr id="11" name="TextBox 10"/>
-          <p:cNvSpPr/>
-          <p:nvPr>
-            <p:ph type="body" idx="6"/>
-          </p:nvPr>
-        </p:nvSpPr>
-        <p:spPr>
-          <a:xfrm>
-            <a:off x="457200" y="3385108"/>
-            <a:ext cx="951348" cy="518159"/>
-          </a:xfrm>
-          <a:prstGeom prst="rect">
-            <a:avLst/>
-          </a:prstGeom>
-          <a:noFill/>
-        </p:spPr>
-        <p:txBody>
-          <a:bodyPr wrap="none" lIns="0" rIns="0">
-            <a:noAutofit/>
-          </a:bodyPr>
-          <a:lstStyle/>
-          <a:p>
-            <a:pPr algn="l"/>
-            <a:r>
-              <a:rPr sz="3400" b="1" i="0">
-                <a:solidFill>
-                  <a:srgbClr val="0072CE"/>
-                </a:solidFill>
-                <a:latin typeface="Arial"/>
-              </a:rPr>
-              <a:t>03</a:t>
-            </a:r>
-          </a:p>
-        </p:txBody>
-      </p:sp>
-      <p:sp>
-        <p:nvSpPr>
-          <p:cNvPr id="12" name="TextBox 11"/>
-          <p:cNvSpPr/>
-          <p:nvPr>
-            <p:ph type="body" idx="7"/>
-          </p:nvPr>
-        </p:nvSpPr>
-        <p:spPr>
-          <a:xfrm>
-            <a:off x="1371600" y="3385108"/>
-            <a:ext cx="10363200" cy="518159"/>
-          </a:xfrm>
-          <a:prstGeom prst="rect">
-            <a:avLst/>
-          </a:prstGeom>
-          <a:noFill/>
-        </p:spPr>
-        <p:txBody>
-          <a:bodyPr wrap="none" lIns="0" rIns="0">
-            <a:noAutofit/>
-          </a:bodyPr>
-          <a:lstStyle/>
-          <a:p>
-            <a:pPr algn="l"/>
-            <a:r>
-              <a:rPr sz="3400" b="0" i="0">
-                <a:solidFill>
-                  <a:srgbClr val="0A2240"/>
-                </a:solidFill>
-                <a:latin typeface="Arial"/>
-              </a:rPr>
-              <a:t>Operational health and risks</a:t>
-            </a:r>
-          </a:p>
-        </p:txBody>
-      </p:sp>
-      <p:sp>
-        <p:nvSpPr>
-          <p:cNvPr id="13" name="TextBox 12"/>
-          <p:cNvSpPr/>
-          <p:nvPr>
-            <p:ph type="body" idx="8"/>
-          </p:nvPr>
-        </p:nvSpPr>
-        <p:spPr>
-          <a:xfrm>
-            <a:off x="457200" y="4268418"/>
-            <a:ext cx="951348" cy="518159"/>
-          </a:xfrm>
-          <a:prstGeom prst="rect">
-            <a:avLst/>
-          </a:prstGeom>
-          <a:noFill/>
-        </p:spPr>
-        <p:txBody>
-          <a:bodyPr wrap="none" lIns="0" rIns="0">
-            <a:noAutofit/>
-          </a:bodyPr>
-          <a:lstStyle/>
-          <a:p>
-            <a:pPr algn="l"/>
-            <a:r>
-              <a:rPr sz="3400" b="1" i="0">
-                <a:solidFill>
-                  <a:srgbClr val="0072CE"/>
-                </a:solidFill>
-                <a:latin typeface="Arial"/>
-              </a:rPr>
-              <a:t>04</a:t>
-            </a:r>
-          </a:p>
-        </p:txBody>
-      </p:sp>
-      <p:sp>
-        <p:nvSpPr>
-          <p:cNvPr id="14" name="TextBox 13"/>
-          <p:cNvSpPr/>
-          <p:nvPr>
-            <p:ph type="body" idx="9"/>
-          </p:nvPr>
-        </p:nvSpPr>
-        <p:spPr>
-          <a:xfrm>
-            <a:off x="1371600" y="4268418"/>
-            <a:ext cx="10363200" cy="518159"/>
-          </a:xfrm>
-          <a:prstGeom prst="rect">
-            <a:avLst/>
-          </a:prstGeom>
-          <a:noFill/>
-        </p:spPr>
-        <p:txBody>
-          <a:bodyPr wrap="none" lIns="0" rIns="0">
-            <a:noAutofit/>
-          </a:bodyPr>
-          <a:lstStyle/>
-          <a:p>
-            <a:pPr algn="l"/>
-            <a:r>
-              <a:rPr sz="3400" b="0" i="0">
-                <a:solidFill>
-                  <a:srgbClr val="0A2240"/>
-                </a:solidFill>
-                <a:latin typeface="Arial"/>
-              </a:rPr>
-              <a:t>Roadmap for next quarter</a:t>
-            </a:r>
-          </a:p>
-        </p:txBody>
-      </p:sp>
-      <p:sp>
-        <p:nvSpPr>
-          <p:cNvPr id="15" name="TextBox 14"/>
-          <p:cNvSpPr/>
-          <p:nvPr>
-            <p:ph type="body" idx="13"/>
-          </p:nvPr>
-        </p:nvSpPr>
-        <p:spPr>
-          <a:xfrm>
-            <a:off x="457200" y="5151728"/>
-            <a:ext cx="951348" cy="518159"/>
-          </a:xfrm>
-          <a:prstGeom prst="rect">
-            <a:avLst/>
-          </a:prstGeom>
-          <a:noFill/>
-        </p:spPr>
-        <p:txBody>
-          <a:bodyPr wrap="none" lIns="0" rIns="0">
-            <a:noAutofit/>
-          </a:bodyPr>
-          <a:lstStyle/>
-          <a:p>
-            <a:pPr algn="l"/>
-            <a:r>
-              <a:rPr sz="3400" b="1" i="0">
-                <a:solidFill>
-                  <a:srgbClr val="0072CE"/>
-                </a:solidFill>
-                <a:latin typeface="Arial"/>
-              </a:rPr>
-              <a:t>05</a:t>
-            </a:r>
-          </a:p>
-        </p:txBody>
-      </p:sp>
-      <p:sp>
-        <p:nvSpPr>
-          <p:cNvPr id="16" name="TextBox 15"/>
-          <p:cNvSpPr/>
-          <p:nvPr>
-            <p:ph type="body" idx="14"/>
-          </p:nvPr>
-        </p:nvSpPr>
-        <p:spPr>
-          <a:xfrm>
-            <a:off x="1371600" y="5151728"/>
-            <a:ext cx="10363200" cy="518159"/>
-          </a:xfrm>
-          <a:prstGeom prst="rect">
-            <a:avLst/>
-          </a:prstGeom>
-          <a:noFill/>
-        </p:spPr>
-        <p:txBody>
-          <a:bodyPr wrap="none" lIns="0" rIns="0">
-            <a:noAutofit/>
-          </a:bodyPr>
-          <a:lstStyle/>
-          <a:p>
-            <a:pPr algn="l"/>
-            <a:r>
-              <a:rPr sz="3400" b="0" i="0">
-                <a:solidFill>
-                  <a:srgbClr val="0A2240"/>
-                </a:solidFill>
-                <a:latin typeface="Arial"/>
-              </a:rPr>
-              <a:t>Decisions we need today</a:t>
-            </a:r>
-          </a:p>
-        </p:txBody>
-      </p:sp>
-    </p:spTree>
-    <p:extLst>
-      <p:ext uri="{BB962C8B-B14F-4D97-AF65-F5344CB8AC3E}">
-        <p14:creationId xmlns:p14="http://schemas.microsoft.com/office/powerpoint/2010/main" val="1212999818"/>
-      </p:ext>
-    </p:extLst>
-  </p:cSld>
-  <p:clrMapOvr>
-    <a:masterClrMapping/>
-  </p:clrMapOvr>
-</p:sldLayout>
-</file>
-
-<file path=ppt/slideLayouts/slideLayout21.xml><?xml version="1.0" encoding="utf-8"?>
-<p:sldLayout xmlns:a="http://schemas.openxmlformats.org/drawingml/2006/main" xmlns:r="http://schemas.openxmlformats.org/officeDocument/2006/relationships" xmlns:p="http://schemas.openxmlformats.org/presentationml/2006/main" type="blank" preserve="1">
   <p:cSld name="slidekit · Big Number">
     <p:bg>
       <p:bgPr>
@@ -5052,7 +4653,7 @@
 </p:sldLayout>
 </file>
 
-<file path=ppt/slideLayouts/slideLayout22.xml><?xml version="1.0" encoding="utf-8"?>
+<file path=ppt/slideLayouts/slideLayout21.xml><?xml version="1.0" encoding="utf-8"?>
 <p:sldLayout xmlns:a="http://schemas.openxmlformats.org/drawingml/2006/main" xmlns:r="http://schemas.openxmlformats.org/officeDocument/2006/relationships" xmlns:p="http://schemas.openxmlformats.org/presentationml/2006/main" type="blank" preserve="1">
   <p:cSld name="slidekit · Pull Quote">
     <p:bg>
@@ -5115,8 +4716,8 @@
         </p:nvSpPr>
         <p:spPr>
           <a:xfrm>
-            <a:off x="457200" y="2301240"/>
-            <a:ext cx="128016" cy="2255520"/>
+            <a:off x="457200" y="2621280"/>
+            <a:ext cx="128016" cy="1615440"/>
           </a:xfrm>
           <a:prstGeom prst="rect">
             <a:avLst/>
@@ -5147,16 +4748,16 @@
         </p:nvSpPr>
         <p:spPr>
           <a:xfrm>
-            <a:off x="996696" y="2301240"/>
-            <a:ext cx="10738104" cy="1371600"/>
-          </a:xfrm>
-          <a:prstGeom prst="rect">
-            <a:avLst/>
-          </a:prstGeom>
-          <a:noFill/>
-        </p:spPr>
-        <p:txBody>
-          <a:bodyPr wrap="square" lIns="0" rIns="0">
+            <a:off x="996696" y="2621280"/>
+            <a:ext cx="11195304" cy="731520"/>
+          </a:xfrm>
+          <a:prstGeom prst="rect">
+            <a:avLst/>
+          </a:prstGeom>
+          <a:noFill/>
+        </p:spPr>
+        <p:txBody>
+          <a:bodyPr wrap="none" lIns="0" rIns="0">
             <a:noAutofit/>
           </a:bodyPr>
           <a:lstStyle/>
@@ -5169,7 +4770,7 @@
                 </a:solidFill>
                 <a:latin typeface="Arial"/>
               </a:rPr>
-              <a:t>"We stopped buying tools and started buying outcomes."</a:t>
+              <a:t>"We buy outcomes, not tools."</a:t>
             </a:r>
           </a:p>
         </p:txBody>
@@ -5184,7 +4785,7 @@
         </p:nvSpPr>
         <p:spPr>
           <a:xfrm>
-            <a:off x="996696" y="3947160"/>
+            <a:off x="996696" y="3627120"/>
             <a:ext cx="11195304" cy="609600"/>
           </a:xfrm>
           <a:prstGeom prst="rect">
@@ -5202,7 +4803,7 @@
             <a:r>
               <a:rPr sz="3400" b="0" i="0">
                 <a:solidFill>
-                  <a:srgbClr val="5B6B82"/>
+                  <a:srgbClr val="0A2240"/>
                 </a:solidFill>
                 <a:latin typeface="Arial"/>
               </a:rPr>
@@ -5224,7 +4825,7 @@
 </p:sldLayout>
 </file>
 
-<file path=ppt/slideLayouts/slideLayout23.xml><?xml version="1.0" encoding="utf-8"?>
+<file path=ppt/slideLayouts/slideLayout22.xml><?xml version="1.0" encoding="utf-8"?>
 <p:sldLayout xmlns:a="http://schemas.openxmlformats.org/drawingml/2006/main" xmlns:r="http://schemas.openxmlformats.org/officeDocument/2006/relationships" xmlns:p="http://schemas.openxmlformats.org/presentationml/2006/main" type="blank" preserve="1">
   <p:cSld name="slidekit · Definition">
     <p:bg>
@@ -5287,8 +4888,8 @@
         </p:nvSpPr>
         <p:spPr>
           <a:xfrm>
-            <a:off x="457200" y="1965960"/>
-            <a:ext cx="128016" cy="2926080"/>
+            <a:off x="457200" y="2484120"/>
+            <a:ext cx="128016" cy="1889760"/>
           </a:xfrm>
           <a:prstGeom prst="rect">
             <a:avLst/>
@@ -5319,7 +4920,7 @@
         </p:nvSpPr>
         <p:spPr>
           <a:xfrm>
-            <a:off x="996696" y="1965960"/>
+            <a:off x="996696" y="2484120"/>
             <a:ext cx="11195304" cy="1005840"/>
           </a:xfrm>
           <a:prstGeom prst="rect">
@@ -5356,16 +4957,16 @@
         </p:nvSpPr>
         <p:spPr>
           <a:xfrm>
-            <a:off x="996696" y="3246120"/>
-            <a:ext cx="10738104" cy="1645920"/>
-          </a:xfrm>
-          <a:prstGeom prst="rect">
-            <a:avLst/>
-          </a:prstGeom>
-          <a:noFill/>
-        </p:spPr>
-        <p:txBody>
-          <a:bodyPr wrap="square" lIns="0" rIns="0">
+            <a:off x="996696" y="3764280"/>
+            <a:ext cx="11195304" cy="609600"/>
+          </a:xfrm>
+          <a:prstGeom prst="rect">
+            <a:avLst/>
+          </a:prstGeom>
+          <a:noFill/>
+        </p:spPr>
+        <p:txBody>
+          <a:bodyPr wrap="none" lIns="0" rIns="0">
             <a:noAutofit/>
           </a:bodyPr>
           <a:lstStyle/>
@@ -5378,7 +4979,7 @@
                 </a:solidFill>
                 <a:latin typeface="Arial"/>
               </a:rPr>
-              <a:t>The percentage of recurring revenue retained from existing customers over a period, including expansion and after churn.</a:t>
+              <a:t>Revenue kept from existing customers.</a:t>
             </a:r>
           </a:p>
         </p:txBody>
@@ -5396,7 +4997,7 @@
 </p:sldLayout>
 </file>
 
-<file path=ppt/slideLayouts/slideLayout24.xml><?xml version="1.0" encoding="utf-8"?>
+<file path=ppt/slideLayouts/slideLayout23.xml><?xml version="1.0" encoding="utf-8"?>
 <p:sldLayout xmlns:a="http://schemas.openxmlformats.org/drawingml/2006/main" xmlns:r="http://schemas.openxmlformats.org/officeDocument/2006/relationships" xmlns:p="http://schemas.openxmlformats.org/presentationml/2006/main" type="blank" preserve="1">
   <p:cSld name="slidekit · Question">
     <p:bg>
@@ -5459,8 +5060,8 @@
         </p:nvSpPr>
         <p:spPr>
           <a:xfrm>
-            <a:off x="457200" y="2011680"/>
-            <a:ext cx="128016" cy="2834640"/>
+            <a:off x="457200" y="2926080"/>
+            <a:ext cx="128016" cy="1005840"/>
           </a:xfrm>
           <a:prstGeom prst="rect">
             <a:avLst/>
@@ -5491,16 +5092,16 @@
         </p:nvSpPr>
         <p:spPr>
           <a:xfrm>
-            <a:off x="996696" y="2011680"/>
-            <a:ext cx="10738104" cy="2834640"/>
-          </a:xfrm>
-          <a:prstGeom prst="rect">
-            <a:avLst/>
-          </a:prstGeom>
-          <a:noFill/>
-        </p:spPr>
-        <p:txBody>
-          <a:bodyPr wrap="square" lIns="0" rIns="0">
+            <a:off x="996696" y="2926080"/>
+            <a:ext cx="11195304" cy="1005840"/>
+          </a:xfrm>
+          <a:prstGeom prst="rect">
+            <a:avLst/>
+          </a:prstGeom>
+          <a:noFill/>
+        </p:spPr>
+        <p:txBody>
+          <a:bodyPr wrap="none" lIns="0" rIns="0">
             <a:noAutofit/>
           </a:bodyPr>
           <a:lstStyle/>
@@ -5513,7 +5114,7 @@
                 </a:solidFill>
                 <a:latin typeface="Arial"/>
               </a:rPr>
-              <a:t>What would we build if we trusted our customers completely?</a:t>
+              <a:t>What if we trusted users?</a:t>
             </a:r>
           </a:p>
         </p:txBody>
@@ -5531,7 +5132,7 @@
 </p:sldLayout>
 </file>
 
-<file path=ppt/slideLayouts/slideLayout25.xml><?xml version="1.0" encoding="utf-8"?>
+<file path=ppt/slideLayouts/slideLayout24.xml><?xml version="1.0" encoding="utf-8"?>
 <p:sldLayout xmlns:a="http://schemas.openxmlformats.org/drawingml/2006/main" xmlns:r="http://schemas.openxmlformats.org/officeDocument/2006/relationships" xmlns:p="http://schemas.openxmlformats.org/presentationml/2006/main" type="blank" preserve="1">
   <p:cSld name="slidekit · Bullet List">
     <p:bg>
@@ -5745,7 +5346,7 @@
 </p:sldLayout>
 </file>
 
-<file path=ppt/slideLayouts/slideLayout26.xml><?xml version="1.0" encoding="utf-8"?>
+<file path=ppt/slideLayouts/slideLayout25.xml><?xml version="1.0" encoding="utf-8"?>
 <p:sldLayout xmlns:a="http://schemas.openxmlformats.org/drawingml/2006/main" xmlns:r="http://schemas.openxmlformats.org/officeDocument/2006/relationships" xmlns:p="http://schemas.openxmlformats.org/presentationml/2006/main" type="blank" preserve="1">
   <p:cSld name="slidekit · Code Block">
     <p:bg>
@@ -5815,7 +5416,7 @@
             <a:avLst/>
           </a:prstGeom>
           <a:solidFill>
-            <a:srgbClr val="FF5F56"/>
+            <a:srgbClr val="FFFFFF"/>
           </a:solidFill>
           <a:ln>
             <a:noFill/>
@@ -5847,7 +5448,7 @@
             <a:avLst/>
           </a:prstGeom>
           <a:solidFill>
-            <a:srgbClr val="FFBD2E"/>
+            <a:srgbClr val="FFFFFF"/>
           </a:solidFill>
           <a:ln>
             <a:noFill/>
@@ -5879,7 +5480,7 @@
             <a:avLst/>
           </a:prstGeom>
           <a:solidFill>
-            <a:srgbClr val="27C93F"/>
+            <a:srgbClr val="FFFFFF"/>
           </a:solidFill>
           <a:ln>
             <a:noFill/>
@@ -5922,7 +5523,7 @@
             <a:r>
               <a:rPr sz="4200" b="0" i="0">
                 <a:solidFill>
-                  <a:srgbClr val="D4D4D4"/>
+                  <a:srgbClr val="FFFFFF"/>
                 </a:solidFill>
                 <a:latin typeface="Arial"/>
               </a:rPr>
@@ -5959,7 +5560,7 @@
             <a:r>
               <a:rPr sz="3400" b="0" i="0">
                 <a:solidFill>
-                  <a:srgbClr val="6A9955"/>
+                  <a:srgbClr val="FFFFFF"/>
                 </a:solidFill>
                 <a:latin typeface="Arial"/>
               </a:rPr>
@@ -6016,7 +5617,7 @@
         <p:spPr>
           <a:xfrm>
             <a:off x="1057461" y="2356103"/>
-            <a:ext cx="302848" cy="518159"/>
+            <a:ext cx="2524382" cy="518159"/>
           </a:xfrm>
           <a:prstGeom prst="rect">
             <a:avLst/>
@@ -6033,11 +5634,11 @@
             <a:r>
               <a:rPr sz="3400" b="0" i="0">
                 <a:solidFill>
-                  <a:srgbClr val="D4D4D4"/>
-                </a:solidFill>
-                <a:latin typeface="Arial"/>
-              </a:rPr>
-              <a:t> </a:t>
+                  <a:srgbClr val="FFFFFF"/>
+                </a:solidFill>
+                <a:latin typeface="Arial"/>
+              </a:rPr>
+              <a:t> main():</a:t>
             </a:r>
           </a:p>
         </p:txBody>
@@ -6052,8 +5653,8 @@
         </p:nvSpPr>
         <p:spPr>
           <a:xfrm>
-            <a:off x="1177429" y="2356103"/>
-            <a:ext cx="1680348" cy="518159"/>
+            <a:off x="457200" y="2874262"/>
+            <a:ext cx="7046475" cy="518159"/>
           </a:xfrm>
           <a:prstGeom prst="rect">
             <a:avLst/>
@@ -6070,11 +5671,11 @@
             <a:r>
               <a:rPr sz="3400" b="0" i="0">
                 <a:solidFill>
-                  <a:srgbClr val="DCDCAA"/>
-                </a:solidFill>
-                <a:latin typeface="Arial"/>
-              </a:rPr>
-              <a:t>main</a:t>
+                  <a:srgbClr val="FFFFFF"/>
+                </a:solidFill>
+                <a:latin typeface="Arial"/>
+              </a:rPr>
+              <a:t>    print("Hello, world!")</a:t>
             </a:r>
           </a:p>
         </p:txBody>
@@ -6089,8 +5690,8 @@
         </p:nvSpPr>
         <p:spPr>
           <a:xfrm>
-            <a:off x="2113347" y="2356103"/>
-            <a:ext cx="834964" cy="518159"/>
+            <a:off x="457200" y="3910580"/>
+            <a:ext cx="2140486" cy="518159"/>
           </a:xfrm>
           <a:prstGeom prst="rect">
             <a:avLst/>
@@ -6107,11 +5708,11 @@
             <a:r>
               <a:rPr sz="3400" b="0" i="0">
                 <a:solidFill>
-                  <a:srgbClr val="D4D4D4"/>
-                </a:solidFill>
-                <a:latin typeface="Arial"/>
-              </a:rPr>
-              <a:t>():</a:t>
+                  <a:srgbClr val="FFFFFF"/>
+                </a:solidFill>
+                <a:latin typeface="Arial"/>
+              </a:rPr>
+              <a:t>main()</a:t>
             </a:r>
           </a:p>
         </p:txBody>
@@ -6122,265 +5723,6 @@
           <p:cNvSpPr/>
           <p:nvPr>
             <p:ph type="body" idx="13"/>
-          </p:nvPr>
-        </p:nvSpPr>
-        <p:spPr>
-          <a:xfrm>
-            <a:off x="457200" y="2874262"/>
-            <a:ext cx="662751" cy="518159"/>
-          </a:xfrm>
-          <a:prstGeom prst="rect">
-            <a:avLst/>
-          </a:prstGeom>
-          <a:noFill/>
-        </p:spPr>
-        <p:txBody>
-          <a:bodyPr wrap="none" lIns="0" rIns="0">
-            <a:noAutofit/>
-          </a:bodyPr>
-          <a:lstStyle/>
-          <a:p>
-            <a:pPr algn="l"/>
-            <a:r>
-              <a:rPr sz="3400" b="0" i="0">
-                <a:solidFill>
-                  <a:srgbClr val="D4D4D4"/>
-                </a:solidFill>
-                <a:latin typeface="Arial"/>
-              </a:rPr>
-              <a:t>    </a:t>
-            </a:r>
-          </a:p>
-        </p:txBody>
-      </p:sp>
-      <p:sp>
-        <p:nvSpPr>
-          <p:cNvPr id="15" name="TextBox 14"/>
-          <p:cNvSpPr/>
-          <p:nvPr>
-            <p:ph type="body" idx="14"/>
-          </p:nvPr>
-        </p:nvSpPr>
-        <p:spPr>
-          <a:xfrm>
-            <a:off x="937071" y="2874262"/>
-            <a:ext cx="1526857" cy="518159"/>
-          </a:xfrm>
-          <a:prstGeom prst="rect">
-            <a:avLst/>
-          </a:prstGeom>
-          <a:noFill/>
-        </p:spPr>
-        <p:txBody>
-          <a:bodyPr wrap="none" lIns="0" rIns="0">
-            <a:noAutofit/>
-          </a:bodyPr>
-          <a:lstStyle/>
-          <a:p>
-            <a:pPr algn="l"/>
-            <a:r>
-              <a:rPr sz="3400" b="0" i="0">
-                <a:solidFill>
-                  <a:srgbClr val="DCDCAA"/>
-                </a:solidFill>
-                <a:latin typeface="Arial"/>
-              </a:rPr>
-              <a:t>print</a:t>
-            </a:r>
-          </a:p>
-        </p:txBody>
-      </p:sp>
-      <p:sp>
-        <p:nvSpPr>
-          <p:cNvPr id="16" name="TextBox 15"/>
-          <p:cNvSpPr/>
-          <p:nvPr>
-            <p:ph type="body" idx="15"/>
-          </p:nvPr>
-        </p:nvSpPr>
-        <p:spPr>
-          <a:xfrm>
-            <a:off x="1777057" y="2874262"/>
-            <a:ext cx="412948" cy="518159"/>
-          </a:xfrm>
-          <a:prstGeom prst="rect">
-            <a:avLst/>
-          </a:prstGeom>
-          <a:noFill/>
-        </p:spPr>
-        <p:txBody>
-          <a:bodyPr wrap="none" lIns="0" rIns="0">
-            <a:noAutofit/>
-          </a:bodyPr>
-          <a:lstStyle/>
-          <a:p>
-            <a:pPr algn="l"/>
-            <a:r>
-              <a:rPr sz="3400" b="0" i="0">
-                <a:solidFill>
-                  <a:srgbClr val="D4D4D4"/>
-                </a:solidFill>
-                <a:latin typeface="Arial"/>
-              </a:rPr>
-              <a:t>(</a:t>
-            </a:r>
-          </a:p>
-        </p:txBody>
-      </p:sp>
-      <p:sp>
-        <p:nvSpPr>
-          <p:cNvPr id="17" name="TextBox 16"/>
-          <p:cNvSpPr/>
-          <p:nvPr>
-            <p:ph type="body" idx="16"/>
-          </p:nvPr>
-        </p:nvSpPr>
-        <p:spPr>
-          <a:xfrm>
-            <a:off x="1920850" y="2874262"/>
-            <a:ext cx="4474566" cy="518159"/>
-          </a:xfrm>
-          <a:prstGeom prst="rect">
-            <a:avLst/>
-          </a:prstGeom>
-          <a:noFill/>
-        </p:spPr>
-        <p:txBody>
-          <a:bodyPr wrap="none" lIns="0" rIns="0">
-            <a:noAutofit/>
-          </a:bodyPr>
-          <a:lstStyle/>
-          <a:p>
-            <a:pPr algn="l"/>
-            <a:r>
-              <a:rPr sz="3400" b="0" i="0">
-                <a:solidFill>
-                  <a:srgbClr val="CE9178"/>
-                </a:solidFill>
-                <a:latin typeface="Arial"/>
-              </a:rPr>
-              <a:t>"Hello, world!"</a:t>
-            </a:r>
-          </a:p>
-        </p:txBody>
-      </p:sp>
-      <p:sp>
-        <p:nvSpPr>
-          <p:cNvPr id="18" name="TextBox 17"/>
-          <p:cNvSpPr/>
-          <p:nvPr>
-            <p:ph type="body" idx="17"/>
-          </p:nvPr>
-        </p:nvSpPr>
-        <p:spPr>
-          <a:xfrm>
-            <a:off x="4603155" y="2874262"/>
-            <a:ext cx="412948" cy="518159"/>
-          </a:xfrm>
-          <a:prstGeom prst="rect">
-            <a:avLst/>
-          </a:prstGeom>
-          <a:noFill/>
-        </p:spPr>
-        <p:txBody>
-          <a:bodyPr wrap="none" lIns="0" rIns="0">
-            <a:noAutofit/>
-          </a:bodyPr>
-          <a:lstStyle/>
-          <a:p>
-            <a:pPr algn="l"/>
-            <a:r>
-              <a:rPr sz="3400" b="0" i="0">
-                <a:solidFill>
-                  <a:srgbClr val="D4D4D4"/>
-                </a:solidFill>
-                <a:latin typeface="Arial"/>
-              </a:rPr>
-              <a:t>)</a:t>
-            </a:r>
-          </a:p>
-        </p:txBody>
-      </p:sp>
-      <p:sp>
-        <p:nvSpPr>
-          <p:cNvPr id="19" name="TextBox 18"/>
-          <p:cNvSpPr/>
-          <p:nvPr>
-            <p:ph type="body" idx="18"/>
-          </p:nvPr>
-        </p:nvSpPr>
-        <p:spPr>
-          <a:xfrm>
-            <a:off x="457200" y="3910580"/>
-            <a:ext cx="1680348" cy="518159"/>
-          </a:xfrm>
-          <a:prstGeom prst="rect">
-            <a:avLst/>
-          </a:prstGeom>
-          <a:noFill/>
-        </p:spPr>
-        <p:txBody>
-          <a:bodyPr wrap="none" lIns="0" rIns="0">
-            <a:noAutofit/>
-          </a:bodyPr>
-          <a:lstStyle/>
-          <a:p>
-            <a:pPr algn="l"/>
-            <a:r>
-              <a:rPr sz="3400" b="0" i="0">
-                <a:solidFill>
-                  <a:srgbClr val="DCDCAA"/>
-                </a:solidFill>
-                <a:latin typeface="Arial"/>
-              </a:rPr>
-              <a:t>main</a:t>
-            </a:r>
-          </a:p>
-        </p:txBody>
-      </p:sp>
-      <p:sp>
-        <p:nvSpPr>
-          <p:cNvPr id="20" name="TextBox 19"/>
-          <p:cNvSpPr/>
-          <p:nvPr>
-            <p:ph type="body" idx="19"/>
-          </p:nvPr>
-        </p:nvSpPr>
-        <p:spPr>
-          <a:xfrm>
-            <a:off x="1393118" y="3910580"/>
-            <a:ext cx="643017" cy="518159"/>
-          </a:xfrm>
-          <a:prstGeom prst="rect">
-            <a:avLst/>
-          </a:prstGeom>
-          <a:noFill/>
-        </p:spPr>
-        <p:txBody>
-          <a:bodyPr wrap="none" lIns="0" rIns="0">
-            <a:noAutofit/>
-          </a:bodyPr>
-          <a:lstStyle/>
-          <a:p>
-            <a:pPr algn="l"/>
-            <a:r>
-              <a:rPr sz="3400" b="0" i="0">
-                <a:solidFill>
-                  <a:srgbClr val="D4D4D4"/>
-                </a:solidFill>
-                <a:latin typeface="Arial"/>
-              </a:rPr>
-              <a:t>()</a:t>
-            </a:r>
-          </a:p>
-        </p:txBody>
-      </p:sp>
-      <p:sp>
-        <p:nvSpPr>
-          <p:cNvPr id="21" name="TextBox 20"/>
-          <p:cNvSpPr/>
-          <p:nvPr>
-            <p:ph type="body" idx="20"/>
           </p:nvPr>
         </p:nvSpPr>
         <p:spPr>
@@ -6403,7 +5745,7 @@
             <a:r>
               <a:rPr sz="3400" b="0" i="0">
                 <a:solidFill>
-                  <a:srgbClr val="4EC9B0"/>
+                  <a:srgbClr val="569CD6"/>
                 </a:solidFill>
                 <a:latin typeface="Arial"/>
               </a:rPr>
@@ -6414,10 +5756,10 @@
       </p:sp>
       <p:sp>
         <p:nvSpPr>
-          <p:cNvPr id="22" name="TextBox 21"/>
-          <p:cNvSpPr/>
-          <p:nvPr>
-            <p:ph type="body" idx="21"/>
+          <p:cNvPr id="15" name="TextBox 14"/>
+          <p:cNvSpPr/>
+          <p:nvPr>
+            <p:ph type="body" idx="14"/>
           </p:nvPr>
         </p:nvSpPr>
         <p:spPr>
@@ -6440,7 +5782,7 @@
             <a:r>
               <a:rPr sz="3400" b="0" i="0">
                 <a:solidFill>
-                  <a:srgbClr val="D4D4D4"/>
+                  <a:srgbClr val="FFFFFF"/>
                 </a:solidFill>
                 <a:latin typeface="Arial"/>
               </a:rPr>
@@ -6451,10 +5793,10 @@
       </p:sp>
       <p:sp>
         <p:nvSpPr>
-          <p:cNvPr id="23" name="TextBox 22"/>
-          <p:cNvSpPr/>
-          <p:nvPr>
-            <p:ph type="body" idx="22"/>
+          <p:cNvPr id="16" name="TextBox 15"/>
+          <p:cNvSpPr/>
+          <p:nvPr>
+            <p:ph type="body" idx="15"/>
           </p:nvPr>
         </p:nvSpPr>
         <p:spPr>
@@ -6477,7 +5819,7 @@
             <a:r>
               <a:rPr sz="3400" b="0" i="0">
                 <a:solidFill>
-                  <a:srgbClr val="D4D4D4"/>
+                  <a:srgbClr val="FFFFFF"/>
                 </a:solidFill>
                 <a:latin typeface="Arial"/>
               </a:rPr>
@@ -6499,7 +5841,7 @@
 </p:sldLayout>
 </file>
 
-<file path=ppt/slideLayouts/slideLayout27.xml><?xml version="1.0" encoding="utf-8"?>
+<file path=ppt/slideLayouts/slideLayout26.xml><?xml version="1.0" encoding="utf-8"?>
 <p:sldLayout xmlns:a="http://schemas.openxmlformats.org/drawingml/2006/main" xmlns:r="http://schemas.openxmlformats.org/officeDocument/2006/relationships" xmlns:p="http://schemas.openxmlformats.org/presentationml/2006/main" type="blank" preserve="1">
   <p:cSld name="slidekit · File Tree">
     <p:bg>
@@ -6608,7 +5950,7 @@
             </a:avLst>
           </a:prstGeom>
           <a:solidFill>
-            <a:srgbClr val="0C1A1C"/>
+            <a:srgbClr val="0A2240"/>
           </a:solidFill>
           <a:ln>
             <a:noFill/>
@@ -6651,7 +5993,7 @@
             <a:r>
               <a:rPr sz="2600" b="1" i="0">
                 <a:solidFill>
-                  <a:srgbClr val="569CD6"/>
+                  <a:srgbClr val="0072CE"/>
                 </a:solidFill>
                 <a:latin typeface="Courier New"/>
               </a:rPr>
@@ -6688,7 +6030,7 @@
             <a:r>
               <a:rPr sz="2600" b="0" i="0">
                 <a:solidFill>
-                  <a:srgbClr val="55707A"/>
+                  <a:srgbClr val="0072CE"/>
                 </a:solidFill>
                 <a:latin typeface="Courier New"/>
               </a:rPr>
@@ -6725,7 +6067,7 @@
             <a:r>
               <a:rPr sz="2600" b="1" i="0">
                 <a:solidFill>
-                  <a:srgbClr val="569CD6"/>
+                  <a:srgbClr val="0072CE"/>
                 </a:solidFill>
                 <a:latin typeface="Courier New"/>
               </a:rPr>
@@ -6762,7 +6104,7 @@
             <a:r>
               <a:rPr sz="2600" b="0" i="0">
                 <a:solidFill>
-                  <a:srgbClr val="55707A"/>
+                  <a:srgbClr val="0072CE"/>
                 </a:solidFill>
                 <a:latin typeface="Courier New"/>
               </a:rPr>
@@ -6799,7 +6141,7 @@
             <a:r>
               <a:rPr sz="2600" b="1" i="0">
                 <a:solidFill>
-                  <a:srgbClr val="569CD6"/>
+                  <a:srgbClr val="0072CE"/>
                 </a:solidFill>
                 <a:latin typeface="Courier New"/>
               </a:rPr>
@@ -6836,7 +6178,7 @@
             <a:r>
               <a:rPr sz="2600" b="0" i="0">
                 <a:solidFill>
-                  <a:srgbClr val="55707A"/>
+                  <a:srgbClr val="0072CE"/>
                 </a:solidFill>
                 <a:latin typeface="Courier New"/>
               </a:rPr>
@@ -6873,7 +6215,7 @@
             <a:r>
               <a:rPr sz="2600" b="0" i="0">
                 <a:solidFill>
-                  <a:srgbClr val="D4D4D4"/>
+                  <a:srgbClr val="FFFFFF"/>
                 </a:solidFill>
                 <a:latin typeface="Courier New"/>
               </a:rPr>
@@ -6910,7 +6252,7 @@
             <a:r>
               <a:rPr sz="2600" b="0" i="0">
                 <a:solidFill>
-                  <a:srgbClr val="55707A"/>
+                  <a:srgbClr val="0072CE"/>
                 </a:solidFill>
                 <a:latin typeface="Courier New"/>
               </a:rPr>
@@ -6947,7 +6289,7 @@
             <a:r>
               <a:rPr sz="2600" b="0" i="0">
                 <a:solidFill>
-                  <a:srgbClr val="D4D4D4"/>
+                  <a:srgbClr val="FFFFFF"/>
                 </a:solidFill>
                 <a:latin typeface="Courier New"/>
               </a:rPr>
@@ -6984,7 +6326,7 @@
             <a:r>
               <a:rPr sz="2600" b="0" i="0">
                 <a:solidFill>
-                  <a:srgbClr val="55707A"/>
+                  <a:srgbClr val="0072CE"/>
                 </a:solidFill>
                 <a:latin typeface="Courier New"/>
               </a:rPr>
@@ -7021,7 +6363,7 @@
             <a:r>
               <a:rPr sz="2600" b="0" i="0">
                 <a:solidFill>
-                  <a:srgbClr val="D4D4D4"/>
+                  <a:srgbClr val="FFFFFF"/>
                 </a:solidFill>
                 <a:latin typeface="Courier New"/>
               </a:rPr>
@@ -7058,7 +6400,7 @@
             <a:r>
               <a:rPr sz="2600" b="0" i="0">
                 <a:solidFill>
-                  <a:srgbClr val="55707A"/>
+                  <a:srgbClr val="0072CE"/>
                 </a:solidFill>
                 <a:latin typeface="Courier New"/>
               </a:rPr>
@@ -7095,7 +6437,7 @@
             <a:r>
               <a:rPr sz="2600" b="0" i="0">
                 <a:solidFill>
-                  <a:srgbClr val="D4D4D4"/>
+                  <a:srgbClr val="FFFFFF"/>
                 </a:solidFill>
                 <a:latin typeface="Courier New"/>
               </a:rPr>
@@ -7132,7 +6474,7 @@
             <a:r>
               <a:rPr sz="2600" b="0" i="0">
                 <a:solidFill>
-                  <a:srgbClr val="55707A"/>
+                  <a:srgbClr val="0072CE"/>
                 </a:solidFill>
                 <a:latin typeface="Courier New"/>
               </a:rPr>
@@ -7169,7 +6511,7 @@
             <a:r>
               <a:rPr sz="2600" b="0" i="0">
                 <a:solidFill>
-                  <a:srgbClr val="D4D4D4"/>
+                  <a:srgbClr val="FFFFFF"/>
                 </a:solidFill>
                 <a:latin typeface="Courier New"/>
               </a:rPr>
@@ -7191,7 +6533,7 @@
 </p:sldLayout>
 </file>
 
-<file path=ppt/slideLayouts/slideLayout28.xml><?xml version="1.0" encoding="utf-8"?>
+<file path=ppt/slideLayouts/slideLayout27.xml><?xml version="1.0" encoding="utf-8"?>
 <p:sldLayout xmlns:a="http://schemas.openxmlformats.org/drawingml/2006/main" xmlns:r="http://schemas.openxmlformats.org/officeDocument/2006/relationships" xmlns:p="http://schemas.openxmlformats.org/presentationml/2006/main" type="blank" preserve="1">
   <p:cSld name="slidekit · Numbered Steps">
     <p:bg>
@@ -7627,7 +6969,7 @@
 </p:sldLayout>
 </file>
 
-<file path=ppt/slideLayouts/slideLayout29.xml><?xml version="1.0" encoding="utf-8"?>
+<file path=ppt/slideLayouts/slideLayout28.xml><?xml version="1.0" encoding="utf-8"?>
 <p:sldLayout xmlns:a="http://schemas.openxmlformats.org/drawingml/2006/main" xmlns:r="http://schemas.openxmlformats.org/officeDocument/2006/relationships" xmlns:p="http://schemas.openxmlformats.org/presentationml/2006/main" type="blank" preserve="1">
   <p:cSld name="slidekit · Two Panel List">
     <p:bg>
@@ -7764,8 +7106,8 @@
         </p:nvSpPr>
         <p:spPr>
           <a:xfrm>
-            <a:off x="548640" y="2176271"/>
-            <a:ext cx="1650492" cy="54864"/>
+            <a:off x="457200" y="2176271"/>
+            <a:ext cx="1367718" cy="54864"/>
           </a:xfrm>
           <a:prstGeom prst="rect">
             <a:avLst/>
@@ -7814,7 +7156,7 @@
             <a:r>
               <a:rPr sz="3400" b="1" i="0">
                 <a:solidFill>
-                  <a:srgbClr val="5B6B82"/>
+                  <a:srgbClr val="0A2240"/>
                 </a:solidFill>
                 <a:latin typeface="Arial"/>
               </a:rPr>
@@ -7833,14 +7175,14 @@
         </p:nvSpPr>
         <p:spPr>
           <a:xfrm>
-            <a:off x="6324600" y="2176271"/>
-            <a:ext cx="1650492" cy="54864"/>
+            <a:off x="6233160" y="2176271"/>
+            <a:ext cx="1007604" cy="54864"/>
           </a:xfrm>
           <a:prstGeom prst="rect">
             <a:avLst/>
           </a:prstGeom>
           <a:solidFill>
-            <a:srgbClr val="5B6B82"/>
+            <a:srgbClr val="0A2240"/>
           </a:solidFill>
           <a:ln>
             <a:noFill/>
@@ -8073,6 +7415,294 @@
                 <a:latin typeface="Arial"/>
               </a:rPr>
               <a:t>In-product live chat</a:t>
+            </a:r>
+          </a:p>
+        </p:txBody>
+      </p:sp>
+    </p:spTree>
+    <p:extLst>
+      <p:ext uri="{BB962C8B-B14F-4D97-AF65-F5344CB8AC3E}">
+        <p14:creationId xmlns:p14="http://schemas.microsoft.com/office/powerpoint/2010/main" val="1212999818"/>
+      </p:ext>
+    </p:extLst>
+  </p:cSld>
+  <p:clrMapOvr>
+    <a:masterClrMapping/>
+  </p:clrMapOvr>
+</p:sldLayout>
+</file>
+
+<file path=ppt/slideLayouts/slideLayout29.xml><?xml version="1.0" encoding="utf-8"?>
+<p:sldLayout xmlns:a="http://schemas.openxmlformats.org/drawingml/2006/main" xmlns:r="http://schemas.openxmlformats.org/officeDocument/2006/relationships" xmlns:p="http://schemas.openxmlformats.org/presentationml/2006/main" type="blank" preserve="1">
+  <p:cSld name="slidekit · This vs That">
+    <p:bg>
+      <p:bgPr>
+        <a:solidFill>
+          <a:srgbClr val="FFFFFF"/>
+        </a:solidFill>
+        <a:effectLst/>
+      </p:bgPr>
+    </p:bg>
+    <p:spTree>
+      <p:nvGrpSpPr>
+        <p:cNvPr id="1" name=""/>
+        <p:cNvGrpSpPr/>
+        <p:nvPr/>
+      </p:nvGrpSpPr>
+      <p:grpSpPr>
+        <a:xfrm>
+          <a:off x="0" y="0"/>
+          <a:ext cx="0" cy="0"/>
+          <a:chOff x="0" y="0"/>
+          <a:chExt cx="0" cy="0"/>
+        </a:xfrm>
+      </p:grpSpPr>
+      <p:sp>
+        <p:nvSpPr>
+          <p:cNvPr id="4" name="Slide Number Placeholder 3"/>
+          <p:cNvSpPr>
+            <a:spLocks noGrp="1"/>
+          </p:cNvSpPr>
+          <p:nvPr>
+            <p:ph type="sldNum" sz="quarter" idx="12"/>
+          </p:nvPr>
+        </p:nvSpPr>
+        <p:spPr>
+          <a:xfrm>
+            <a:off x="11186160" y="6035040"/>
+            <a:ext cx="548640" cy="365760"/>
+          </a:xfrm>
+        </p:spPr>
+        <p:txBody>
+          <a:bodyPr/>
+          <a:lstStyle/>
+          <a:p>
+            <a:fld id="{C1FF6DA9-008F-8B48-92A6-B652298478BF}" type="slidenum">
+              <a:rPr lang="en-US" smtClean="0"/>
+              <a:t>‹#›</a:t>
+            </a:fld>
+            <a:endParaRPr lang="en-US"/>
+          </a:p>
+        </p:txBody>
+      </p:sp>
+      <p:sp>
+        <p:nvSpPr>
+          <p:cNvPr id="5" name="TextBox 4"/>
+          <p:cNvSpPr/>
+          <p:nvPr>
+            <p:ph type="title"/>
+          </p:nvPr>
+        </p:nvSpPr>
+        <p:spPr>
+          <a:xfrm>
+            <a:off x="457200" y="457200"/>
+            <a:ext cx="11277600" cy="768096"/>
+          </a:xfrm>
+          <a:prstGeom prst="rect">
+            <a:avLst/>
+          </a:prstGeom>
+          <a:noFill/>
+        </p:spPr>
+        <p:txBody>
+          <a:bodyPr wrap="none" lIns="0" rIns="0">
+            <a:noAutofit/>
+          </a:bodyPr>
+          <a:lstStyle/>
+          <a:p>
+            <a:pPr algn="l"/>
+            <a:r>
+              <a:rPr sz="4200" b="1" i="0">
+                <a:solidFill>
+                  <a:srgbClr val="0072CE"/>
+                </a:solidFill>
+                <a:latin typeface="Arial"/>
+              </a:rPr>
+              <a:t>Cloud or On-Prem</a:t>
+            </a:r>
+          </a:p>
+        </p:txBody>
+      </p:sp>
+      <p:sp>
+        <p:nvSpPr>
+          <p:cNvPr id="6" name="TextBox 5"/>
+          <p:cNvSpPr/>
+          <p:nvPr>
+            <p:ph type="body" idx="1"/>
+          </p:nvPr>
+        </p:nvSpPr>
+        <p:spPr>
+          <a:xfrm>
+            <a:off x="457200" y="2776728"/>
+            <a:ext cx="4792980" cy="914400"/>
+          </a:xfrm>
+          <a:prstGeom prst="rect">
+            <a:avLst/>
+          </a:prstGeom>
+          <a:noFill/>
+        </p:spPr>
+        <p:txBody>
+          <a:bodyPr wrap="none" lIns="0" rIns="0">
+            <a:noAutofit/>
+          </a:bodyPr>
+          <a:lstStyle/>
+          <a:p>
+            <a:pPr algn="ctr"/>
+            <a:r>
+              <a:rPr sz="6000" b="1" i="0">
+                <a:solidFill>
+                  <a:srgbClr val="0A2240"/>
+                </a:solidFill>
+                <a:latin typeface="Arial"/>
+              </a:rPr>
+              <a:t>3 wks</a:t>
+            </a:r>
+          </a:p>
+        </p:txBody>
+      </p:sp>
+      <p:sp>
+        <p:nvSpPr>
+          <p:cNvPr id="7" name="TextBox 6"/>
+          <p:cNvSpPr/>
+          <p:nvPr>
+            <p:ph type="body" idx="2"/>
+          </p:nvPr>
+        </p:nvSpPr>
+        <p:spPr>
+          <a:xfrm>
+            <a:off x="0" y="3965448"/>
+            <a:ext cx="5707380" cy="518159"/>
+          </a:xfrm>
+          <a:prstGeom prst="rect">
+            <a:avLst/>
+          </a:prstGeom>
+          <a:noFill/>
+        </p:spPr>
+        <p:txBody>
+          <a:bodyPr wrap="none" lIns="0" rIns="0">
+            <a:noAutofit/>
+          </a:bodyPr>
+          <a:lstStyle/>
+          <a:p>
+            <a:pPr algn="ctr"/>
+            <a:r>
+              <a:rPr sz="3400" b="0" i="0">
+                <a:solidFill>
+                  <a:srgbClr val="0A2240"/>
+                </a:solidFill>
+                <a:latin typeface="Arial"/>
+              </a:rPr>
+              <a:t>Cloud time-to-launch</a:t>
+            </a:r>
+          </a:p>
+        </p:txBody>
+      </p:sp>
+      <p:sp>
+        <p:nvSpPr>
+          <p:cNvPr id="8" name="TextBox 7"/>
+          <p:cNvSpPr/>
+          <p:nvPr>
+            <p:ph type="body" idx="3"/>
+          </p:nvPr>
+        </p:nvSpPr>
+        <p:spPr>
+          <a:xfrm>
+            <a:off x="6941820" y="2776728"/>
+            <a:ext cx="4792980" cy="914400"/>
+          </a:xfrm>
+          <a:prstGeom prst="rect">
+            <a:avLst/>
+          </a:prstGeom>
+          <a:noFill/>
+        </p:spPr>
+        <p:txBody>
+          <a:bodyPr wrap="none" lIns="0" rIns="0">
+            <a:noAutofit/>
+          </a:bodyPr>
+          <a:lstStyle/>
+          <a:p>
+            <a:pPr algn="ctr"/>
+            <a:r>
+              <a:rPr sz="6000" b="1" i="0">
+                <a:solidFill>
+                  <a:srgbClr val="0A2240"/>
+                </a:solidFill>
+                <a:latin typeface="Arial"/>
+              </a:rPr>
+              <a:t>6 mo</a:t>
+            </a:r>
+          </a:p>
+        </p:txBody>
+      </p:sp>
+      <p:sp>
+        <p:nvSpPr>
+          <p:cNvPr id="9" name="TextBox 8"/>
+          <p:cNvSpPr/>
+          <p:nvPr>
+            <p:ph type="body" idx="4"/>
+          </p:nvPr>
+        </p:nvSpPr>
+        <p:spPr>
+          <a:xfrm>
+            <a:off x="6484620" y="3965448"/>
+            <a:ext cx="5707380" cy="518159"/>
+          </a:xfrm>
+          <a:prstGeom prst="rect">
+            <a:avLst/>
+          </a:prstGeom>
+          <a:noFill/>
+        </p:spPr>
+        <p:txBody>
+          <a:bodyPr wrap="none" lIns="0" rIns="0">
+            <a:noAutofit/>
+          </a:bodyPr>
+          <a:lstStyle/>
+          <a:p>
+            <a:pPr algn="ctr"/>
+            <a:r>
+              <a:rPr sz="3400" b="0" i="0">
+                <a:solidFill>
+                  <a:srgbClr val="0A2240"/>
+                </a:solidFill>
+                <a:latin typeface="Arial"/>
+              </a:rPr>
+              <a:t>On-prem time-to-launch</a:t>
+            </a:r>
+          </a:p>
+        </p:txBody>
+      </p:sp>
+      <p:sp>
+        <p:nvSpPr>
+          <p:cNvPr id="10" name="TextBox 9"/>
+          <p:cNvSpPr/>
+          <p:nvPr>
+            <p:ph type="body" idx="5"/>
+          </p:nvPr>
+        </p:nvSpPr>
+        <p:spPr>
+          <a:xfrm>
+            <a:off x="5435323" y="3310127"/>
+            <a:ext cx="1321354" cy="640080"/>
+          </a:xfrm>
+          <a:prstGeom prst="rect">
+            <a:avLst/>
+          </a:prstGeom>
+          <a:noFill/>
+        </p:spPr>
+        <p:txBody>
+          <a:bodyPr wrap="none" lIns="0" rIns="0">
+            <a:noAutofit/>
+          </a:bodyPr>
+          <a:lstStyle/>
+          <a:p>
+            <a:pPr algn="ctr"/>
+            <a:r>
+              <a:rPr sz="4200" b="1" i="0">
+                <a:solidFill>
+                  <a:srgbClr val="0A2240"/>
+                </a:solidFill>
+                <a:latin typeface="Arial"/>
+              </a:rPr>
+              <a:t>VS</a:t>
             </a:r>
           </a:p>
         </p:txBody>
@@ -8338,294 +7968,6 @@
 
 <file path=ppt/slideLayouts/slideLayout30.xml><?xml version="1.0" encoding="utf-8"?>
 <p:sldLayout xmlns:a="http://schemas.openxmlformats.org/drawingml/2006/main" xmlns:r="http://schemas.openxmlformats.org/officeDocument/2006/relationships" xmlns:p="http://schemas.openxmlformats.org/presentationml/2006/main" type="blank" preserve="1">
-  <p:cSld name="slidekit · This vs That">
-    <p:bg>
-      <p:bgPr>
-        <a:solidFill>
-          <a:srgbClr val="FFFFFF"/>
-        </a:solidFill>
-        <a:effectLst/>
-      </p:bgPr>
-    </p:bg>
-    <p:spTree>
-      <p:nvGrpSpPr>
-        <p:cNvPr id="1" name=""/>
-        <p:cNvGrpSpPr/>
-        <p:nvPr/>
-      </p:nvGrpSpPr>
-      <p:grpSpPr>
-        <a:xfrm>
-          <a:off x="0" y="0"/>
-          <a:ext cx="0" cy="0"/>
-          <a:chOff x="0" y="0"/>
-          <a:chExt cx="0" cy="0"/>
-        </a:xfrm>
-      </p:grpSpPr>
-      <p:sp>
-        <p:nvSpPr>
-          <p:cNvPr id="4" name="Slide Number Placeholder 3"/>
-          <p:cNvSpPr>
-            <a:spLocks noGrp="1"/>
-          </p:cNvSpPr>
-          <p:nvPr>
-            <p:ph type="sldNum" sz="quarter" idx="12"/>
-          </p:nvPr>
-        </p:nvSpPr>
-        <p:spPr>
-          <a:xfrm>
-            <a:off x="11186160" y="6035040"/>
-            <a:ext cx="548640" cy="365760"/>
-          </a:xfrm>
-        </p:spPr>
-        <p:txBody>
-          <a:bodyPr/>
-          <a:lstStyle/>
-          <a:p>
-            <a:fld id="{C1FF6DA9-008F-8B48-92A6-B652298478BF}" type="slidenum">
-              <a:rPr lang="en-US" smtClean="0"/>
-              <a:t>‹#›</a:t>
-            </a:fld>
-            <a:endParaRPr lang="en-US"/>
-          </a:p>
-        </p:txBody>
-      </p:sp>
-      <p:sp>
-        <p:nvSpPr>
-          <p:cNvPr id="5" name="TextBox 4"/>
-          <p:cNvSpPr/>
-          <p:nvPr>
-            <p:ph type="title"/>
-          </p:nvPr>
-        </p:nvSpPr>
-        <p:spPr>
-          <a:xfrm>
-            <a:off x="457200" y="457200"/>
-            <a:ext cx="11277600" cy="768096"/>
-          </a:xfrm>
-          <a:prstGeom prst="rect">
-            <a:avLst/>
-          </a:prstGeom>
-          <a:noFill/>
-        </p:spPr>
-        <p:txBody>
-          <a:bodyPr wrap="none" lIns="0" rIns="0">
-            <a:noAutofit/>
-          </a:bodyPr>
-          <a:lstStyle/>
-          <a:p>
-            <a:pPr algn="l"/>
-            <a:r>
-              <a:rPr sz="4200" b="1" i="0">
-                <a:solidFill>
-                  <a:srgbClr val="0072CE"/>
-                </a:solidFill>
-                <a:latin typeface="Arial"/>
-              </a:rPr>
-              <a:t>Cloud or On-Prem</a:t>
-            </a:r>
-          </a:p>
-        </p:txBody>
-      </p:sp>
-      <p:sp>
-        <p:nvSpPr>
-          <p:cNvPr id="6" name="TextBox 5"/>
-          <p:cNvSpPr/>
-          <p:nvPr>
-            <p:ph type="body" idx="1"/>
-          </p:nvPr>
-        </p:nvSpPr>
-        <p:spPr>
-          <a:xfrm>
-            <a:off x="457200" y="2776728"/>
-            <a:ext cx="4792980" cy="914400"/>
-          </a:xfrm>
-          <a:prstGeom prst="rect">
-            <a:avLst/>
-          </a:prstGeom>
-          <a:noFill/>
-        </p:spPr>
-        <p:txBody>
-          <a:bodyPr wrap="none" lIns="0" rIns="0">
-            <a:noAutofit/>
-          </a:bodyPr>
-          <a:lstStyle/>
-          <a:p>
-            <a:pPr algn="ctr"/>
-            <a:r>
-              <a:rPr sz="6000" b="1" i="0">
-                <a:solidFill>
-                  <a:srgbClr val="0A2240"/>
-                </a:solidFill>
-                <a:latin typeface="Arial"/>
-              </a:rPr>
-              <a:t>3 wks</a:t>
-            </a:r>
-          </a:p>
-        </p:txBody>
-      </p:sp>
-      <p:sp>
-        <p:nvSpPr>
-          <p:cNvPr id="7" name="TextBox 6"/>
-          <p:cNvSpPr/>
-          <p:nvPr>
-            <p:ph type="body" idx="2"/>
-          </p:nvPr>
-        </p:nvSpPr>
-        <p:spPr>
-          <a:xfrm>
-            <a:off x="0" y="3965448"/>
-            <a:ext cx="5707380" cy="518159"/>
-          </a:xfrm>
-          <a:prstGeom prst="rect">
-            <a:avLst/>
-          </a:prstGeom>
-          <a:noFill/>
-        </p:spPr>
-        <p:txBody>
-          <a:bodyPr wrap="none" lIns="0" rIns="0">
-            <a:noAutofit/>
-          </a:bodyPr>
-          <a:lstStyle/>
-          <a:p>
-            <a:pPr algn="ctr"/>
-            <a:r>
-              <a:rPr sz="3400" b="0" i="0">
-                <a:solidFill>
-                  <a:srgbClr val="0A2240"/>
-                </a:solidFill>
-                <a:latin typeface="Arial"/>
-              </a:rPr>
-              <a:t>Cloud time-to-launch</a:t>
-            </a:r>
-          </a:p>
-        </p:txBody>
-      </p:sp>
-      <p:sp>
-        <p:nvSpPr>
-          <p:cNvPr id="8" name="TextBox 7"/>
-          <p:cNvSpPr/>
-          <p:nvPr>
-            <p:ph type="body" idx="3"/>
-          </p:nvPr>
-        </p:nvSpPr>
-        <p:spPr>
-          <a:xfrm>
-            <a:off x="6941820" y="2776728"/>
-            <a:ext cx="4792980" cy="914400"/>
-          </a:xfrm>
-          <a:prstGeom prst="rect">
-            <a:avLst/>
-          </a:prstGeom>
-          <a:noFill/>
-        </p:spPr>
-        <p:txBody>
-          <a:bodyPr wrap="none" lIns="0" rIns="0">
-            <a:noAutofit/>
-          </a:bodyPr>
-          <a:lstStyle/>
-          <a:p>
-            <a:pPr algn="ctr"/>
-            <a:r>
-              <a:rPr sz="6000" b="1" i="0">
-                <a:solidFill>
-                  <a:srgbClr val="0A2240"/>
-                </a:solidFill>
-                <a:latin typeface="Arial"/>
-              </a:rPr>
-              <a:t>6 mo</a:t>
-            </a:r>
-          </a:p>
-        </p:txBody>
-      </p:sp>
-      <p:sp>
-        <p:nvSpPr>
-          <p:cNvPr id="9" name="TextBox 8"/>
-          <p:cNvSpPr/>
-          <p:nvPr>
-            <p:ph type="body" idx="4"/>
-          </p:nvPr>
-        </p:nvSpPr>
-        <p:spPr>
-          <a:xfrm>
-            <a:off x="6484620" y="3965448"/>
-            <a:ext cx="5707380" cy="518159"/>
-          </a:xfrm>
-          <a:prstGeom prst="rect">
-            <a:avLst/>
-          </a:prstGeom>
-          <a:noFill/>
-        </p:spPr>
-        <p:txBody>
-          <a:bodyPr wrap="none" lIns="0" rIns="0">
-            <a:noAutofit/>
-          </a:bodyPr>
-          <a:lstStyle/>
-          <a:p>
-            <a:pPr algn="ctr"/>
-            <a:r>
-              <a:rPr sz="3400" b="0" i="0">
-                <a:solidFill>
-                  <a:srgbClr val="0A2240"/>
-                </a:solidFill>
-                <a:latin typeface="Arial"/>
-              </a:rPr>
-              <a:t>On-prem time-to-launch</a:t>
-            </a:r>
-          </a:p>
-        </p:txBody>
-      </p:sp>
-      <p:sp>
-        <p:nvSpPr>
-          <p:cNvPr id="10" name="TextBox 9"/>
-          <p:cNvSpPr/>
-          <p:nvPr>
-            <p:ph type="body" idx="5"/>
-          </p:nvPr>
-        </p:nvSpPr>
-        <p:spPr>
-          <a:xfrm>
-            <a:off x="5435323" y="3310127"/>
-            <a:ext cx="1321354" cy="640080"/>
-          </a:xfrm>
-          <a:prstGeom prst="rect">
-            <a:avLst/>
-          </a:prstGeom>
-          <a:noFill/>
-        </p:spPr>
-        <p:txBody>
-          <a:bodyPr wrap="none" lIns="0" rIns="0">
-            <a:noAutofit/>
-          </a:bodyPr>
-          <a:lstStyle/>
-          <a:p>
-            <a:pPr algn="ctr"/>
-            <a:r>
-              <a:rPr sz="4200" b="1" i="0">
-                <a:solidFill>
-                  <a:srgbClr val="5B6B82"/>
-                </a:solidFill>
-                <a:latin typeface="Arial"/>
-              </a:rPr>
-              <a:t>VS</a:t>
-            </a:r>
-          </a:p>
-        </p:txBody>
-      </p:sp>
-    </p:spTree>
-    <p:extLst>
-      <p:ext uri="{BB962C8B-B14F-4D97-AF65-F5344CB8AC3E}">
-        <p14:creationId xmlns:p14="http://schemas.microsoft.com/office/powerpoint/2010/main" val="1212999818"/>
-      </p:ext>
-    </p:extLst>
-  </p:cSld>
-  <p:clrMapOvr>
-    <a:masterClrMapping/>
-  </p:clrMapOvr>
-</p:sldLayout>
-</file>
-
-<file path=ppt/slideLayouts/slideLayout31.xml><?xml version="1.0" encoding="utf-8"?>
-<p:sldLayout xmlns:a="http://schemas.openxmlformats.org/drawingml/2006/main" xmlns:r="http://schemas.openxmlformats.org/officeDocument/2006/relationships" xmlns:p="http://schemas.openxmlformats.org/presentationml/2006/main" type="blank" preserve="1">
   <p:cSld name="slidekit · KPI Grid">
     <p:bg>
       <p:bgPr>
@@ -9148,7 +8490,7 @@
         </p:nvSpPr>
         <p:spPr>
           <a:xfrm>
-            <a:off x="4307840" y="3797808"/>
+            <a:off x="4307840" y="4056888"/>
             <a:ext cx="3576320" cy="640080"/>
           </a:xfrm>
           <a:prstGeom prst="rect">
@@ -9185,7 +8527,7 @@
         </p:nvSpPr>
         <p:spPr>
           <a:xfrm>
-            <a:off x="5559552" y="4492752"/>
+            <a:off x="5559552" y="4751832"/>
             <a:ext cx="1072896" cy="54864"/>
           </a:xfrm>
           <a:prstGeom prst="rect">
@@ -9217,16 +8559,16 @@
         </p:nvSpPr>
         <p:spPr>
           <a:xfrm>
-            <a:off x="4307840" y="4602480"/>
-            <a:ext cx="3576320" cy="1127760"/>
-          </a:xfrm>
-          <a:prstGeom prst="rect">
-            <a:avLst/>
-          </a:prstGeom>
-          <a:noFill/>
-        </p:spPr>
-        <p:txBody>
-          <a:bodyPr wrap="square" lIns="0" rIns="0">
+            <a:off x="3943896" y="4861560"/>
+            <a:ext cx="4304208" cy="609600"/>
+          </a:xfrm>
+          <a:prstGeom prst="rect">
+            <a:avLst/>
+          </a:prstGeom>
+          <a:noFill/>
+        </p:spPr>
+        <p:txBody>
+          <a:bodyPr wrap="none" lIns="0" rIns="0">
             <a:noAutofit/>
           </a:bodyPr>
           <a:lstStyle/>
@@ -9239,7 +8581,7 @@
                 </a:solidFill>
                 <a:latin typeface="Arial"/>
               </a:rPr>
-              <a:t>Avg. time to value</a:t>
+              <a:t>Time to value</a:t>
             </a:r>
           </a:p>
         </p:txBody>
@@ -9363,7 +8705,7 @@
 </p:sldLayout>
 </file>
 
-<file path=ppt/slideLayouts/slideLayout32.xml><?xml version="1.0" encoding="utf-8"?>
+<file path=ppt/slideLayouts/slideLayout31.xml><?xml version="1.0" encoding="utf-8"?>
 <p:sldLayout xmlns:a="http://schemas.openxmlformats.org/drawingml/2006/main" xmlns:r="http://schemas.openxmlformats.org/officeDocument/2006/relationships" xmlns:p="http://schemas.openxmlformats.org/presentationml/2006/main" type="blank" preserve="1">
   <p:cSld name="slidekit · Chart With Insight">
     <p:bg>
@@ -9550,7 +8892,7 @@
             <a:r>
               <a:rPr sz="2500" b="0" i="0">
                 <a:solidFill>
-                  <a:srgbClr val="5B6B82"/>
+                  <a:srgbClr val="0A2240"/>
                 </a:solidFill>
                 <a:latin typeface="Arial"/>
               </a:rPr>
@@ -9656,7 +8998,7 @@
             <a:r>
               <a:rPr sz="2500" b="0" i="0">
                 <a:solidFill>
-                  <a:srgbClr val="5B6B82"/>
+                  <a:srgbClr val="0A2240"/>
                 </a:solidFill>
                 <a:latin typeface="Arial"/>
               </a:rPr>
@@ -9762,7 +9104,7 @@
             <a:r>
               <a:rPr sz="2500" b="0" i="0">
                 <a:solidFill>
-                  <a:srgbClr val="5B6B82"/>
+                  <a:srgbClr val="0A2240"/>
                 </a:solidFill>
                 <a:latin typeface="Arial"/>
               </a:rPr>
@@ -9868,7 +9210,7 @@
             <a:r>
               <a:rPr sz="2500" b="0" i="0">
                 <a:solidFill>
-                  <a:srgbClr val="5B6B82"/>
+                  <a:srgbClr val="0A2240"/>
                 </a:solidFill>
                 <a:latin typeface="Arial"/>
               </a:rPr>
@@ -9887,8 +9229,8 @@
         </p:nvSpPr>
         <p:spPr>
           <a:xfrm>
-            <a:off x="7498080" y="1770888"/>
-            <a:ext cx="128016" cy="3718560"/>
+            <a:off x="7498080" y="3325368"/>
+            <a:ext cx="128016" cy="609600"/>
           </a:xfrm>
           <a:prstGeom prst="rect">
             <a:avLst/>
@@ -9919,16 +9261,16 @@
         </p:nvSpPr>
         <p:spPr>
           <a:xfrm>
-            <a:off x="8037576" y="1770888"/>
-            <a:ext cx="3697224" cy="3718560"/>
-          </a:xfrm>
-          <a:prstGeom prst="rect">
-            <a:avLst/>
-          </a:prstGeom>
-          <a:noFill/>
-        </p:spPr>
-        <p:txBody>
-          <a:bodyPr wrap="square" lIns="0" rIns="0">
+            <a:off x="8037576" y="3325368"/>
+            <a:ext cx="4154424" cy="609600"/>
+          </a:xfrm>
+          <a:prstGeom prst="rect">
+            <a:avLst/>
+          </a:prstGeom>
+          <a:noFill/>
+        </p:spPr>
+        <p:txBody>
+          <a:bodyPr wrap="none" lIns="0" rIns="0">
             <a:noAutofit/>
           </a:bodyPr>
           <a:lstStyle/>
@@ -9941,7 +9283,7 @@
                 </a:solidFill>
                 <a:latin typeface="Arial"/>
               </a:rPr>
-              <a:t>Activations nearly quadrupled once self-serve onboarding shipped in February.</a:t>
+              <a:t>Activations 4x.</a:t>
             </a:r>
           </a:p>
         </p:txBody>
@@ -9959,7 +9301,7 @@
 </p:sldLayout>
 </file>
 
-<file path=ppt/slideLayouts/slideLayout33.xml><?xml version="1.0" encoding="utf-8"?>
+<file path=ppt/slideLayouts/slideLayout32.xml><?xml version="1.0" encoding="utf-8"?>
 <p:sldLayout xmlns:a="http://schemas.openxmlformats.org/drawingml/2006/main" xmlns:r="http://schemas.openxmlformats.org/officeDocument/2006/relationships" xmlns:p="http://schemas.openxmlformats.org/presentationml/2006/main" type="blank" preserve="1">
   <p:cSld name="slidekit · Table">
     <p:bg>
@@ -10649,7 +9991,7 @@
 </p:sldLayout>
 </file>
 
-<file path=ppt/slideLayouts/slideLayout34.xml><?xml version="1.0" encoding="utf-8"?>
+<file path=ppt/slideLayouts/slideLayout33.xml><?xml version="1.0" encoding="utf-8"?>
 <p:sldLayout xmlns:a="http://schemas.openxmlformats.org/drawingml/2006/main" xmlns:r="http://schemas.openxmlformats.org/officeDocument/2006/relationships" xmlns:p="http://schemas.openxmlformats.org/presentationml/2006/main" type="blank" preserve="1">
   <p:cSld name="slidekit · Metric Comparison">
     <p:bg>
@@ -10749,7 +10091,7 @@
         </p:nvSpPr>
         <p:spPr>
           <a:xfrm>
-            <a:off x="457200" y="2075688"/>
+            <a:off x="457200" y="2334768"/>
             <a:ext cx="3576320" cy="914400"/>
           </a:xfrm>
           <a:prstGeom prst="rect">
@@ -10786,16 +10128,16 @@
         </p:nvSpPr>
         <p:spPr>
           <a:xfrm>
-            <a:off x="457200" y="3264408"/>
-            <a:ext cx="3576320" cy="1127760"/>
-          </a:xfrm>
-          <a:prstGeom prst="rect">
-            <a:avLst/>
-          </a:prstGeom>
-          <a:noFill/>
-        </p:spPr>
-        <p:txBody>
-          <a:bodyPr wrap="square" lIns="0" rIns="0">
+            <a:off x="457200" y="3523488"/>
+            <a:ext cx="3576320" cy="609600"/>
+          </a:xfrm>
+          <a:prstGeom prst="rect">
+            <a:avLst/>
+          </a:prstGeom>
+          <a:noFill/>
+        </p:spPr>
+        <p:txBody>
+          <a:bodyPr wrap="none" lIns="0" rIns="0">
             <a:noAutofit/>
           </a:bodyPr>
           <a:lstStyle/>
@@ -10808,7 +10150,7 @@
                 </a:solidFill>
                 <a:latin typeface="Arial"/>
               </a:rPr>
-              <a:t>Annual recurring revenue</a:t>
+              <a:t>Revenue</a:t>
             </a:r>
           </a:p>
         </p:txBody>
@@ -10823,7 +10165,7 @@
         </p:nvSpPr>
         <p:spPr>
           <a:xfrm>
-            <a:off x="1522569" y="4666488"/>
+            <a:off x="1522569" y="4407408"/>
             <a:ext cx="1445581" cy="518159"/>
           </a:xfrm>
           <a:prstGeom prst="rect">
@@ -10855,7 +10197,7 @@
         </p:nvSpPr>
         <p:spPr>
           <a:xfrm>
-            <a:off x="1260802" y="4666488"/>
+            <a:off x="1260802" y="4407408"/>
             <a:ext cx="1969115" cy="518159"/>
           </a:xfrm>
           <a:prstGeom prst="rect">
@@ -10892,7 +10234,7 @@
         </p:nvSpPr>
         <p:spPr>
           <a:xfrm>
-            <a:off x="4307840" y="2075688"/>
+            <a:off x="4307840" y="2334768"/>
             <a:ext cx="3576320" cy="914400"/>
           </a:xfrm>
           <a:prstGeom prst="rect">
@@ -10929,8 +10271,8 @@
         </p:nvSpPr>
         <p:spPr>
           <a:xfrm>
-            <a:off x="3834934" y="3264408"/>
-            <a:ext cx="4522132" cy="1127760"/>
+            <a:off x="3834934" y="3523488"/>
+            <a:ext cx="4522132" cy="609600"/>
           </a:xfrm>
           <a:prstGeom prst="rect">
             <a:avLst/>
@@ -10966,7 +10308,7 @@
         </p:nvSpPr>
         <p:spPr>
           <a:xfrm>
-            <a:off x="5175547" y="4666488"/>
+            <a:off x="5175547" y="4407408"/>
             <a:ext cx="1840906" cy="518159"/>
           </a:xfrm>
           <a:prstGeom prst="rect">
@@ -10998,7 +10340,7 @@
         </p:nvSpPr>
         <p:spPr>
           <a:xfrm>
-            <a:off x="4795183" y="4666488"/>
+            <a:off x="4795183" y="4407408"/>
             <a:ext cx="2601634" cy="518159"/>
           </a:xfrm>
           <a:prstGeom prst="rect">
@@ -11035,7 +10377,7 @@
         </p:nvSpPr>
         <p:spPr>
           <a:xfrm>
-            <a:off x="8158480" y="2075688"/>
+            <a:off x="8158480" y="2334768"/>
             <a:ext cx="3576320" cy="914400"/>
           </a:xfrm>
           <a:prstGeom prst="rect">
@@ -11072,16 +10414,16 @@
         </p:nvSpPr>
         <p:spPr>
           <a:xfrm>
-            <a:off x="8158480" y="3264408"/>
-            <a:ext cx="3576320" cy="1127760"/>
-          </a:xfrm>
-          <a:prstGeom prst="rect">
-            <a:avLst/>
-          </a:prstGeom>
-          <a:noFill/>
-        </p:spPr>
-        <p:txBody>
-          <a:bodyPr wrap="square" lIns="0" rIns="0">
+            <a:off x="7701280" y="3523488"/>
+            <a:ext cx="4490720" cy="609600"/>
+          </a:xfrm>
+          <a:prstGeom prst="rect">
+            <a:avLst/>
+          </a:prstGeom>
+          <a:noFill/>
+        </p:spPr>
+        <p:txBody>
+          <a:bodyPr wrap="none" lIns="0" rIns="0">
             <a:noAutofit/>
           </a:bodyPr>
           <a:lstStyle/>
@@ -11094,7 +10436,7 @@
                 </a:solidFill>
                 <a:latin typeface="Arial"/>
               </a:rPr>
-              <a:t>Net promoter score</a:t>
+              <a:t>Promoter score</a:t>
             </a:r>
           </a:p>
         </p:txBody>
@@ -11109,7 +10451,7 @@
         </p:nvSpPr>
         <p:spPr>
           <a:xfrm>
-            <a:off x="9427731" y="4666488"/>
+            <a:off x="9427731" y="4407408"/>
             <a:ext cx="1037817" cy="518159"/>
           </a:xfrm>
           <a:prstGeom prst="rect">
@@ -11141,7 +10483,7 @@
         </p:nvSpPr>
         <p:spPr>
           <a:xfrm>
-            <a:off x="9288294" y="4666488"/>
+            <a:off x="9288294" y="4407408"/>
             <a:ext cx="1316691" cy="518159"/>
           </a:xfrm>
           <a:prstGeom prst="rect">
@@ -11181,7 +10523,7 @@
 </p:sldLayout>
 </file>
 
-<file path=ppt/slideLayouts/slideLayout35.xml><?xml version="1.0" encoding="utf-8"?>
+<file path=ppt/slideLayouts/slideLayout34.xml><?xml version="1.0" encoding="utf-8"?>
 <p:sldLayout xmlns:a="http://schemas.openxmlformats.org/drawingml/2006/main" xmlns:r="http://schemas.openxmlformats.org/officeDocument/2006/relationships" xmlns:p="http://schemas.openxmlformats.org/presentationml/2006/main" type="blank" preserve="1">
   <p:cSld name="slidekit · Process Steps">
     <p:bg>
@@ -11319,7 +10661,7 @@
         <p:spPr>
           <a:xfrm>
             <a:off x="457200" y="2194560"/>
-            <a:ext cx="784098" cy="54864"/>
+            <a:ext cx="593303" cy="54864"/>
           </a:xfrm>
           <a:prstGeom prst="rect">
             <a:avLst/>
@@ -11462,7 +10804,7 @@
         <p:spPr>
           <a:xfrm>
             <a:off x="3345180" y="2194560"/>
-            <a:ext cx="784098" cy="54864"/>
+            <a:ext cx="593303" cy="54864"/>
           </a:xfrm>
           <a:prstGeom prst="rect">
             <a:avLst/>
@@ -11605,7 +10947,7 @@
         <p:spPr>
           <a:xfrm>
             <a:off x="6233160" y="2194560"/>
-            <a:ext cx="784098" cy="54864"/>
+            <a:ext cx="593303" cy="54864"/>
           </a:xfrm>
           <a:prstGeom prst="rect">
             <a:avLst/>
@@ -11748,7 +11090,7 @@
         <p:spPr>
           <a:xfrm>
             <a:off x="9121140" y="2194560"/>
-            <a:ext cx="784098" cy="54864"/>
+            <a:ext cx="593303" cy="54864"/>
           </a:xfrm>
           <a:prstGeom prst="rect">
             <a:avLst/>
@@ -11856,7 +11198,7 @@
 </p:sldLayout>
 </file>
 
-<file path=ppt/slideLayouts/slideLayout36.xml><?xml version="1.0" encoding="utf-8"?>
+<file path=ppt/slideLayouts/slideLayout35.xml><?xml version="1.0" encoding="utf-8"?>
 <p:sldLayout xmlns:a="http://schemas.openxmlformats.org/drawingml/2006/main" xmlns:r="http://schemas.openxmlformats.org/officeDocument/2006/relationships" xmlns:p="http://schemas.openxmlformats.org/presentationml/2006/main" type="blank" preserve="1">
   <p:cSld name="slidekit · Roadmap">
     <p:bg>
@@ -12388,7 +11730,7 @@
 </p:sldLayout>
 </file>
 
-<file path=ppt/slideLayouts/slideLayout37.xml><?xml version="1.0" encoding="utf-8"?>
+<file path=ppt/slideLayouts/slideLayout36.xml><?xml version="1.0" encoding="utf-8"?>
 <p:sldLayout xmlns:a="http://schemas.openxmlformats.org/drawingml/2006/main" xmlns:r="http://schemas.openxmlformats.org/officeDocument/2006/relationships" xmlns:p="http://schemas.openxmlformats.org/presentationml/2006/main" type="blank" preserve="1">
   <p:cSld name="slidekit · Funnel">
     <p:bg>
@@ -12767,7 +12109,7 @@
 </p:sldLayout>
 </file>
 
-<file path=ppt/slideLayouts/slideLayout38.xml><?xml version="1.0" encoding="utf-8"?>
+<file path=ppt/slideLayouts/slideLayout37.xml><?xml version="1.0" encoding="utf-8"?>
 <p:sldLayout xmlns:a="http://schemas.openxmlformats.org/drawingml/2006/main" xmlns:r="http://schemas.openxmlformats.org/officeDocument/2006/relationships" xmlns:p="http://schemas.openxmlformats.org/presentationml/2006/main" type="blank" preserve="1">
   <p:cSld name="slidekit · Nested Circles">
     <p:bg>
@@ -12874,7 +12216,7 @@
             <a:avLst/>
           </a:prstGeom>
           <a:solidFill>
-            <a:srgbClr val="5B6B82"/>
+            <a:srgbClr val="0A2240"/>
           </a:solidFill>
           <a:ln>
             <a:noFill/>
@@ -12938,7 +12280,7 @@
             <a:avLst/>
           </a:prstGeom>
           <a:solidFill>
-            <a:srgbClr val="0072CE"/>
+            <a:srgbClr val="0A2240"/>
           </a:solidFill>
           <a:ln>
             <a:noFill/>
@@ -13188,7 +12530,7 @@
 </p:sldLayout>
 </file>
 
-<file path=ppt/slideLayouts/slideLayout39.xml><?xml version="1.0" encoding="utf-8"?>
+<file path=ppt/slideLayouts/slideLayout38.xml><?xml version="1.0" encoding="utf-8"?>
 <p:sldLayout xmlns:a="http://schemas.openxmlformats.org/drawingml/2006/main" xmlns:r="http://schemas.openxmlformats.org/officeDocument/2006/relationships" xmlns:p="http://schemas.openxmlformats.org/presentationml/2006/main" type="blank" preserve="1">
   <p:cSld name="slidekit · Pyramid">
     <p:bg>
@@ -13550,6 +12892,533 @@
                 <a:latin typeface="Arial"/>
               </a:rPr>
               <a:t>Tactics</a:t>
+            </a:r>
+          </a:p>
+        </p:txBody>
+      </p:sp>
+    </p:spTree>
+    <p:extLst>
+      <p:ext uri="{BB962C8B-B14F-4D97-AF65-F5344CB8AC3E}">
+        <p14:creationId xmlns:p14="http://schemas.microsoft.com/office/powerpoint/2010/main" val="1212999818"/>
+      </p:ext>
+    </p:extLst>
+  </p:cSld>
+  <p:clrMapOvr>
+    <a:masterClrMapping/>
+  </p:clrMapOvr>
+</p:sldLayout>
+</file>
+
+<file path=ppt/slideLayouts/slideLayout39.xml><?xml version="1.0" encoding="utf-8"?>
+<p:sldLayout xmlns:a="http://schemas.openxmlformats.org/drawingml/2006/main" xmlns:r="http://schemas.openxmlformats.org/officeDocument/2006/relationships" xmlns:p="http://schemas.openxmlformats.org/presentationml/2006/main" type="blank" preserve="1">
+  <p:cSld name="slidekit · SWOT">
+    <p:bg>
+      <p:bgPr>
+        <a:solidFill>
+          <a:srgbClr val="FFFFFF"/>
+        </a:solidFill>
+        <a:effectLst/>
+      </p:bgPr>
+    </p:bg>
+    <p:spTree>
+      <p:nvGrpSpPr>
+        <p:cNvPr id="1" name=""/>
+        <p:cNvGrpSpPr/>
+        <p:nvPr/>
+      </p:nvGrpSpPr>
+      <p:grpSpPr>
+        <a:xfrm>
+          <a:off x="0" y="0"/>
+          <a:ext cx="0" cy="0"/>
+          <a:chOff x="0" y="0"/>
+          <a:chExt cx="0" cy="0"/>
+        </a:xfrm>
+      </p:grpSpPr>
+      <p:sp>
+        <p:nvSpPr>
+          <p:cNvPr id="4" name="Slide Number Placeholder 3"/>
+          <p:cNvSpPr>
+            <a:spLocks noGrp="1"/>
+          </p:cNvSpPr>
+          <p:nvPr>
+            <p:ph type="sldNum" sz="quarter" idx="12"/>
+          </p:nvPr>
+        </p:nvSpPr>
+        <p:spPr>
+          <a:xfrm>
+            <a:off x="11186160" y="6035040"/>
+            <a:ext cx="548640" cy="365760"/>
+          </a:xfrm>
+        </p:spPr>
+        <p:txBody>
+          <a:bodyPr/>
+          <a:lstStyle/>
+          <a:p>
+            <a:fld id="{C1FF6DA9-008F-8B48-92A6-B652298478BF}" type="slidenum">
+              <a:rPr lang="en-US" smtClean="0"/>
+              <a:t>‹#›</a:t>
+            </a:fld>
+            <a:endParaRPr lang="en-US"/>
+          </a:p>
+        </p:txBody>
+      </p:sp>
+      <p:sp>
+        <p:nvSpPr>
+          <p:cNvPr id="5" name="TextBox 4"/>
+          <p:cNvSpPr/>
+          <p:nvPr>
+            <p:ph type="title"/>
+          </p:nvPr>
+        </p:nvSpPr>
+        <p:spPr>
+          <a:xfrm>
+            <a:off x="457200" y="457200"/>
+            <a:ext cx="11277600" cy="768096"/>
+          </a:xfrm>
+          <a:prstGeom prst="rect">
+            <a:avLst/>
+          </a:prstGeom>
+          <a:noFill/>
+        </p:spPr>
+        <p:txBody>
+          <a:bodyPr wrap="none" lIns="0" rIns="0">
+            <a:noAutofit/>
+          </a:bodyPr>
+          <a:lstStyle/>
+          <a:p>
+            <a:pPr algn="l"/>
+            <a:r>
+              <a:rPr sz="4200" b="1" i="0">
+                <a:solidFill>
+                  <a:srgbClr val="0072CE"/>
+                </a:solidFill>
+                <a:latin typeface="Arial"/>
+              </a:rPr>
+              <a:t>SWOT Analysis</a:t>
+            </a:r>
+          </a:p>
+        </p:txBody>
+      </p:sp>
+      <p:sp>
+        <p:nvSpPr>
+          <p:cNvPr id="6" name="TextBox 5"/>
+          <p:cNvSpPr/>
+          <p:nvPr>
+            <p:ph type="body" idx="1"/>
+          </p:nvPr>
+        </p:nvSpPr>
+        <p:spPr>
+          <a:xfrm>
+            <a:off x="457200" y="1499616"/>
+            <a:ext cx="5501640" cy="621791"/>
+          </a:xfrm>
+          <a:prstGeom prst="rect">
+            <a:avLst/>
+          </a:prstGeom>
+          <a:noFill/>
+        </p:spPr>
+        <p:txBody>
+          <a:bodyPr wrap="none" lIns="0" rIns="0">
+            <a:noAutofit/>
+          </a:bodyPr>
+          <a:lstStyle/>
+          <a:p>
+            <a:pPr algn="l"/>
+            <a:r>
+              <a:rPr sz="3400" b="1" i="0">
+                <a:solidFill>
+                  <a:srgbClr val="0072CE"/>
+                </a:solidFill>
+                <a:latin typeface="Arial"/>
+              </a:rPr>
+              <a:t>Strengths</a:t>
+            </a:r>
+          </a:p>
+        </p:txBody>
+      </p:sp>
+      <p:sp>
+        <p:nvSpPr>
+          <p:cNvPr id="7" name="Rectangle 6"/>
+          <p:cNvSpPr/>
+          <p:nvPr>
+            <p:ph type="body" idx="2"/>
+          </p:nvPr>
+        </p:nvSpPr>
+        <p:spPr>
+          <a:xfrm>
+            <a:off x="457200" y="2176271"/>
+            <a:ext cx="2015207" cy="54864"/>
+          </a:xfrm>
+          <a:prstGeom prst="rect">
+            <a:avLst/>
+          </a:prstGeom>
+          <a:solidFill>
+            <a:srgbClr val="0072CE"/>
+          </a:solidFill>
+          <a:ln>
+            <a:noFill/>
+          </a:ln>
+          <a:effectLst/>
+        </p:spPr>
+        <p:txBody>
+          <a:bodyPr rtlCol="0" anchor="ctr"/>
+          <a:lstStyle/>
+          <a:p>
+            <a:pPr algn="ctr"/>
+          </a:p>
+        </p:txBody>
+      </p:sp>
+      <p:sp>
+        <p:nvSpPr>
+          <p:cNvPr id="8" name="TextBox 7"/>
+          <p:cNvSpPr/>
+          <p:nvPr>
+            <p:ph type="body" idx="3"/>
+          </p:nvPr>
+        </p:nvSpPr>
+        <p:spPr>
+          <a:xfrm>
+            <a:off x="457200" y="2395727"/>
+            <a:ext cx="7863523" cy="609600"/>
+          </a:xfrm>
+          <a:prstGeom prst="rect">
+            <a:avLst/>
+          </a:prstGeom>
+          <a:noFill/>
+        </p:spPr>
+        <p:txBody>
+          <a:bodyPr wrap="none" lIns="0" rIns="0">
+            <a:noAutofit/>
+          </a:bodyPr>
+          <a:lstStyle/>
+          <a:p>
+            <a:pPr algn="l"/>
+            <a:r>
+              <a:rPr sz="3400" b="0" i="0">
+                <a:solidFill>
+                  <a:srgbClr val="0A2240"/>
+                </a:solidFill>
+                <a:latin typeface="Arial"/>
+              </a:rPr>
+              <a:t>Strong brand, loyal users</a:t>
+            </a:r>
+          </a:p>
+        </p:txBody>
+      </p:sp>
+      <p:sp>
+        <p:nvSpPr>
+          <p:cNvPr id="9" name="TextBox 8"/>
+          <p:cNvSpPr/>
+          <p:nvPr>
+            <p:ph type="body" idx="4"/>
+          </p:nvPr>
+        </p:nvSpPr>
+        <p:spPr>
+          <a:xfrm>
+            <a:off x="6233160" y="1499616"/>
+            <a:ext cx="5501640" cy="621791"/>
+          </a:xfrm>
+          <a:prstGeom prst="rect">
+            <a:avLst/>
+          </a:prstGeom>
+          <a:noFill/>
+        </p:spPr>
+        <p:txBody>
+          <a:bodyPr wrap="none" lIns="0" rIns="0">
+            <a:noAutofit/>
+          </a:bodyPr>
+          <a:lstStyle/>
+          <a:p>
+            <a:pPr algn="l"/>
+            <a:r>
+              <a:rPr sz="3400" b="1" i="0">
+                <a:solidFill>
+                  <a:srgbClr val="0A2240"/>
+                </a:solidFill>
+                <a:latin typeface="Arial"/>
+              </a:rPr>
+              <a:t>Weaknesses</a:t>
+            </a:r>
+          </a:p>
+        </p:txBody>
+      </p:sp>
+      <p:sp>
+        <p:nvSpPr>
+          <p:cNvPr id="10" name="Rectangle 9"/>
+          <p:cNvSpPr/>
+          <p:nvPr>
+            <p:ph type="body" idx="5"/>
+          </p:nvPr>
+        </p:nvSpPr>
+        <p:spPr>
+          <a:xfrm>
+            <a:off x="6233160" y="2176271"/>
+            <a:ext cx="2584686" cy="54864"/>
+          </a:xfrm>
+          <a:prstGeom prst="rect">
+            <a:avLst/>
+          </a:prstGeom>
+          <a:solidFill>
+            <a:srgbClr val="0A2240"/>
+          </a:solidFill>
+          <a:ln>
+            <a:noFill/>
+          </a:ln>
+          <a:effectLst/>
+        </p:spPr>
+        <p:txBody>
+          <a:bodyPr rtlCol="0" anchor="ctr"/>
+          <a:lstStyle/>
+          <a:p>
+            <a:pPr algn="ctr"/>
+          </a:p>
+        </p:txBody>
+      </p:sp>
+      <p:sp>
+        <p:nvSpPr>
+          <p:cNvPr id="11" name="TextBox 10"/>
+          <p:cNvSpPr/>
+          <p:nvPr>
+            <p:ph type="body" idx="6"/>
+          </p:nvPr>
+        </p:nvSpPr>
+        <p:spPr>
+          <a:xfrm>
+            <a:off x="6233160" y="2395727"/>
+            <a:ext cx="5958840" cy="609600"/>
+          </a:xfrm>
+          <a:prstGeom prst="rect">
+            <a:avLst/>
+          </a:prstGeom>
+          <a:noFill/>
+        </p:spPr>
+        <p:txBody>
+          <a:bodyPr wrap="none" lIns="0" rIns="0">
+            <a:noAutofit/>
+          </a:bodyPr>
+          <a:lstStyle/>
+          <a:p>
+            <a:pPr algn="l"/>
+            <a:r>
+              <a:rPr sz="3400" b="0" i="0">
+                <a:solidFill>
+                  <a:srgbClr val="0A2240"/>
+                </a:solidFill>
+                <a:latin typeface="Arial"/>
+              </a:rPr>
+              <a:t>Thin margins, small team</a:t>
+            </a:r>
+          </a:p>
+        </p:txBody>
+      </p:sp>
+      <p:sp>
+        <p:nvSpPr>
+          <p:cNvPr id="12" name="TextBox 11"/>
+          <p:cNvSpPr/>
+          <p:nvPr>
+            <p:ph type="body" idx="7"/>
+          </p:nvPr>
+        </p:nvSpPr>
+        <p:spPr>
+          <a:xfrm>
+            <a:off x="457200" y="3767328"/>
+            <a:ext cx="5501640" cy="621791"/>
+          </a:xfrm>
+          <a:prstGeom prst="rect">
+            <a:avLst/>
+          </a:prstGeom>
+          <a:noFill/>
+        </p:spPr>
+        <p:txBody>
+          <a:bodyPr wrap="none" lIns="0" rIns="0">
+            <a:noAutofit/>
+          </a:bodyPr>
+          <a:lstStyle/>
+          <a:p>
+            <a:pPr algn="l"/>
+            <a:r>
+              <a:rPr sz="3400" b="1" i="0">
+                <a:solidFill>
+                  <a:srgbClr val="0072CE"/>
+                </a:solidFill>
+                <a:latin typeface="Arial"/>
+              </a:rPr>
+              <a:t>Opportunities</a:t>
+            </a:r>
+          </a:p>
+        </p:txBody>
+      </p:sp>
+      <p:sp>
+        <p:nvSpPr>
+          <p:cNvPr id="13" name="Rectangle 12"/>
+          <p:cNvSpPr/>
+          <p:nvPr>
+            <p:ph type="body" idx="8"/>
+          </p:nvPr>
+        </p:nvSpPr>
+        <p:spPr>
+          <a:xfrm>
+            <a:off x="457200" y="4443983"/>
+            <a:ext cx="2830525" cy="54864"/>
+          </a:xfrm>
+          <a:prstGeom prst="rect">
+            <a:avLst/>
+          </a:prstGeom>
+          <a:solidFill>
+            <a:srgbClr val="0072CE"/>
+          </a:solidFill>
+          <a:ln>
+            <a:noFill/>
+          </a:ln>
+          <a:effectLst/>
+        </p:spPr>
+        <p:txBody>
+          <a:bodyPr rtlCol="0" anchor="ctr"/>
+          <a:lstStyle/>
+          <a:p>
+            <a:pPr algn="ctr"/>
+          </a:p>
+        </p:txBody>
+      </p:sp>
+      <p:sp>
+        <p:nvSpPr>
+          <p:cNvPr id="14" name="TextBox 13"/>
+          <p:cNvSpPr/>
+          <p:nvPr>
+            <p:ph type="body" idx="9"/>
+          </p:nvPr>
+        </p:nvSpPr>
+        <p:spPr>
+          <a:xfrm>
+            <a:off x="457200" y="4663439"/>
+            <a:ext cx="8015326" cy="609600"/>
+          </a:xfrm>
+          <a:prstGeom prst="rect">
+            <a:avLst/>
+          </a:prstGeom>
+          <a:noFill/>
+        </p:spPr>
+        <p:txBody>
+          <a:bodyPr wrap="none" lIns="0" rIns="0">
+            <a:noAutofit/>
+          </a:bodyPr>
+          <a:lstStyle/>
+          <a:p>
+            <a:pPr algn="l"/>
+            <a:r>
+              <a:rPr sz="3400" b="0" i="0">
+                <a:solidFill>
+                  <a:srgbClr val="0A2240"/>
+                </a:solidFill>
+                <a:latin typeface="Arial"/>
+              </a:rPr>
+              <a:t>New markets via partners</a:t>
+            </a:r>
+          </a:p>
+        </p:txBody>
+      </p:sp>
+      <p:sp>
+        <p:nvSpPr>
+          <p:cNvPr id="15" name="TextBox 14"/>
+          <p:cNvSpPr/>
+          <p:nvPr>
+            <p:ph type="body" idx="13"/>
+          </p:nvPr>
+        </p:nvSpPr>
+        <p:spPr>
+          <a:xfrm>
+            <a:off x="6233160" y="3767328"/>
+            <a:ext cx="5501640" cy="621791"/>
+          </a:xfrm>
+          <a:prstGeom prst="rect">
+            <a:avLst/>
+          </a:prstGeom>
+          <a:noFill/>
+        </p:spPr>
+        <p:txBody>
+          <a:bodyPr wrap="none" lIns="0" rIns="0">
+            <a:noAutofit/>
+          </a:bodyPr>
+          <a:lstStyle/>
+          <a:p>
+            <a:pPr algn="l"/>
+            <a:r>
+              <a:rPr sz="3400" b="1" i="0">
+                <a:solidFill>
+                  <a:srgbClr val="0A2240"/>
+                </a:solidFill>
+                <a:latin typeface="Arial"/>
+              </a:rPr>
+              <a:t>Threats</a:t>
+            </a:r>
+          </a:p>
+        </p:txBody>
+      </p:sp>
+      <p:sp>
+        <p:nvSpPr>
+          <p:cNvPr id="16" name="Rectangle 15"/>
+          <p:cNvSpPr/>
+          <p:nvPr>
+            <p:ph type="body" idx="14"/>
+          </p:nvPr>
+        </p:nvSpPr>
+        <p:spPr>
+          <a:xfrm>
+            <a:off x="6233160" y="4443983"/>
+            <a:ext cx="1559793" cy="54864"/>
+          </a:xfrm>
+          <a:prstGeom prst="rect">
+            <a:avLst/>
+          </a:prstGeom>
+          <a:solidFill>
+            <a:srgbClr val="0A2240"/>
+          </a:solidFill>
+          <a:ln>
+            <a:noFill/>
+          </a:ln>
+          <a:effectLst/>
+        </p:spPr>
+        <p:txBody>
+          <a:bodyPr rtlCol="0" anchor="ctr"/>
+          <a:lstStyle/>
+          <a:p>
+            <a:pPr algn="ctr"/>
+          </a:p>
+        </p:txBody>
+      </p:sp>
+      <p:sp>
+        <p:nvSpPr>
+          <p:cNvPr id="17" name="TextBox 16"/>
+          <p:cNvSpPr/>
+          <p:nvPr>
+            <p:ph type="body" idx="15"/>
+          </p:nvPr>
+        </p:nvSpPr>
+        <p:spPr>
+          <a:xfrm>
+            <a:off x="6233160" y="4663439"/>
+            <a:ext cx="5958840" cy="609600"/>
+          </a:xfrm>
+          <a:prstGeom prst="rect">
+            <a:avLst/>
+          </a:prstGeom>
+          <a:noFill/>
+        </p:spPr>
+        <p:txBody>
+          <a:bodyPr wrap="none" lIns="0" rIns="0">
+            <a:noAutofit/>
+          </a:bodyPr>
+          <a:lstStyle/>
+          <a:p>
+            <a:pPr algn="l"/>
+            <a:r>
+              <a:rPr sz="3400" b="0" i="0">
+                <a:solidFill>
+                  <a:srgbClr val="0A2240"/>
+                </a:solidFill>
+                <a:latin typeface="Arial"/>
+              </a:rPr>
+              <a:t>New entrants cut prices</a:t>
             </a:r>
           </a:p>
         </p:txBody>
@@ -13856,533 +13725,6 @@
 </file>
 
 <file path=ppt/slideLayouts/slideLayout40.xml><?xml version="1.0" encoding="utf-8"?>
-<p:sldLayout xmlns:a="http://schemas.openxmlformats.org/drawingml/2006/main" xmlns:r="http://schemas.openxmlformats.org/officeDocument/2006/relationships" xmlns:p="http://schemas.openxmlformats.org/presentationml/2006/main" type="blank" preserve="1">
-  <p:cSld name="slidekit · SWOT">
-    <p:bg>
-      <p:bgPr>
-        <a:solidFill>
-          <a:srgbClr val="FFFFFF"/>
-        </a:solidFill>
-        <a:effectLst/>
-      </p:bgPr>
-    </p:bg>
-    <p:spTree>
-      <p:nvGrpSpPr>
-        <p:cNvPr id="1" name=""/>
-        <p:cNvGrpSpPr/>
-        <p:nvPr/>
-      </p:nvGrpSpPr>
-      <p:grpSpPr>
-        <a:xfrm>
-          <a:off x="0" y="0"/>
-          <a:ext cx="0" cy="0"/>
-          <a:chOff x="0" y="0"/>
-          <a:chExt cx="0" cy="0"/>
-        </a:xfrm>
-      </p:grpSpPr>
-      <p:sp>
-        <p:nvSpPr>
-          <p:cNvPr id="4" name="Slide Number Placeholder 3"/>
-          <p:cNvSpPr>
-            <a:spLocks noGrp="1"/>
-          </p:cNvSpPr>
-          <p:nvPr>
-            <p:ph type="sldNum" sz="quarter" idx="12"/>
-          </p:nvPr>
-        </p:nvSpPr>
-        <p:spPr>
-          <a:xfrm>
-            <a:off x="11186160" y="6035040"/>
-            <a:ext cx="548640" cy="365760"/>
-          </a:xfrm>
-        </p:spPr>
-        <p:txBody>
-          <a:bodyPr/>
-          <a:lstStyle/>
-          <a:p>
-            <a:fld id="{C1FF6DA9-008F-8B48-92A6-B652298478BF}" type="slidenum">
-              <a:rPr lang="en-US" smtClean="0"/>
-              <a:t>‹#›</a:t>
-            </a:fld>
-            <a:endParaRPr lang="en-US"/>
-          </a:p>
-        </p:txBody>
-      </p:sp>
-      <p:sp>
-        <p:nvSpPr>
-          <p:cNvPr id="5" name="TextBox 4"/>
-          <p:cNvSpPr/>
-          <p:nvPr>
-            <p:ph type="title"/>
-          </p:nvPr>
-        </p:nvSpPr>
-        <p:spPr>
-          <a:xfrm>
-            <a:off x="457200" y="457200"/>
-            <a:ext cx="11277600" cy="768096"/>
-          </a:xfrm>
-          <a:prstGeom prst="rect">
-            <a:avLst/>
-          </a:prstGeom>
-          <a:noFill/>
-        </p:spPr>
-        <p:txBody>
-          <a:bodyPr wrap="none" lIns="0" rIns="0">
-            <a:noAutofit/>
-          </a:bodyPr>
-          <a:lstStyle/>
-          <a:p>
-            <a:pPr algn="l"/>
-            <a:r>
-              <a:rPr sz="4200" b="1" i="0">
-                <a:solidFill>
-                  <a:srgbClr val="0072CE"/>
-                </a:solidFill>
-                <a:latin typeface="Arial"/>
-              </a:rPr>
-              <a:t>SWOT Analysis</a:t>
-            </a:r>
-          </a:p>
-        </p:txBody>
-      </p:sp>
-      <p:sp>
-        <p:nvSpPr>
-          <p:cNvPr id="6" name="TextBox 5"/>
-          <p:cNvSpPr/>
-          <p:nvPr>
-            <p:ph type="body" idx="1"/>
-          </p:nvPr>
-        </p:nvSpPr>
-        <p:spPr>
-          <a:xfrm>
-            <a:off x="457200" y="1499616"/>
-            <a:ext cx="5501640" cy="621791"/>
-          </a:xfrm>
-          <a:prstGeom prst="rect">
-            <a:avLst/>
-          </a:prstGeom>
-          <a:noFill/>
-        </p:spPr>
-        <p:txBody>
-          <a:bodyPr wrap="none" lIns="0" rIns="0">
-            <a:noAutofit/>
-          </a:bodyPr>
-          <a:lstStyle/>
-          <a:p>
-            <a:pPr algn="l"/>
-            <a:r>
-              <a:rPr sz="3400" b="1" i="0">
-                <a:solidFill>
-                  <a:srgbClr val="0072CE"/>
-                </a:solidFill>
-                <a:latin typeface="Arial"/>
-              </a:rPr>
-              <a:t>Strengths</a:t>
-            </a:r>
-          </a:p>
-        </p:txBody>
-      </p:sp>
-      <p:sp>
-        <p:nvSpPr>
-          <p:cNvPr id="7" name="Rectangle 6"/>
-          <p:cNvSpPr/>
-          <p:nvPr>
-            <p:ph type="body" idx="2"/>
-          </p:nvPr>
-        </p:nvSpPr>
-        <p:spPr>
-          <a:xfrm>
-            <a:off x="457200" y="2176271"/>
-            <a:ext cx="1650492" cy="54864"/>
-          </a:xfrm>
-          <a:prstGeom prst="rect">
-            <a:avLst/>
-          </a:prstGeom>
-          <a:solidFill>
-            <a:srgbClr val="0072CE"/>
-          </a:solidFill>
-          <a:ln>
-            <a:noFill/>
-          </a:ln>
-          <a:effectLst/>
-        </p:spPr>
-        <p:txBody>
-          <a:bodyPr rtlCol="0" anchor="ctr"/>
-          <a:lstStyle/>
-          <a:p>
-            <a:pPr algn="ctr"/>
-          </a:p>
-        </p:txBody>
-      </p:sp>
-      <p:sp>
-        <p:nvSpPr>
-          <p:cNvPr id="8" name="TextBox 7"/>
-          <p:cNvSpPr/>
-          <p:nvPr>
-            <p:ph type="body" idx="3"/>
-          </p:nvPr>
-        </p:nvSpPr>
-        <p:spPr>
-          <a:xfrm>
-            <a:off x="457200" y="2395727"/>
-            <a:ext cx="5501640" cy="1097281"/>
-          </a:xfrm>
-          <a:prstGeom prst="rect">
-            <a:avLst/>
-          </a:prstGeom>
-          <a:noFill/>
-        </p:spPr>
-        <p:txBody>
-          <a:bodyPr wrap="square" lIns="0" rIns="0">
-            <a:noAutofit/>
-          </a:bodyPr>
-          <a:lstStyle/>
-          <a:p>
-            <a:pPr algn="l"/>
-            <a:r>
-              <a:rPr sz="3400" b="0" i="0">
-                <a:solidFill>
-                  <a:srgbClr val="0A2240"/>
-                </a:solidFill>
-                <a:latin typeface="Arial"/>
-              </a:rPr>
-              <a:t>A strong brand with loyal users</a:t>
-            </a:r>
-          </a:p>
-        </p:txBody>
-      </p:sp>
-      <p:sp>
-        <p:nvSpPr>
-          <p:cNvPr id="9" name="TextBox 8"/>
-          <p:cNvSpPr/>
-          <p:nvPr>
-            <p:ph type="body" idx="4"/>
-          </p:nvPr>
-        </p:nvSpPr>
-        <p:spPr>
-          <a:xfrm>
-            <a:off x="6233160" y="1499616"/>
-            <a:ext cx="5501640" cy="621791"/>
-          </a:xfrm>
-          <a:prstGeom prst="rect">
-            <a:avLst/>
-          </a:prstGeom>
-          <a:noFill/>
-        </p:spPr>
-        <p:txBody>
-          <a:bodyPr wrap="none" lIns="0" rIns="0">
-            <a:noAutofit/>
-          </a:bodyPr>
-          <a:lstStyle/>
-          <a:p>
-            <a:pPr algn="l"/>
-            <a:r>
-              <a:rPr sz="3400" b="1" i="0">
-                <a:solidFill>
-                  <a:srgbClr val="5B6B82"/>
-                </a:solidFill>
-                <a:latin typeface="Arial"/>
-              </a:rPr>
-              <a:t>Weaknesses</a:t>
-            </a:r>
-          </a:p>
-        </p:txBody>
-      </p:sp>
-      <p:sp>
-        <p:nvSpPr>
-          <p:cNvPr id="10" name="Rectangle 9"/>
-          <p:cNvSpPr/>
-          <p:nvPr>
-            <p:ph type="body" idx="5"/>
-          </p:nvPr>
-        </p:nvSpPr>
-        <p:spPr>
-          <a:xfrm>
-            <a:off x="6233160" y="2176271"/>
-            <a:ext cx="1650492" cy="54864"/>
-          </a:xfrm>
-          <a:prstGeom prst="rect">
-            <a:avLst/>
-          </a:prstGeom>
-          <a:solidFill>
-            <a:srgbClr val="5B6B82"/>
-          </a:solidFill>
-          <a:ln>
-            <a:noFill/>
-          </a:ln>
-          <a:effectLst/>
-        </p:spPr>
-        <p:txBody>
-          <a:bodyPr rtlCol="0" anchor="ctr"/>
-          <a:lstStyle/>
-          <a:p>
-            <a:pPr algn="ctr"/>
-          </a:p>
-        </p:txBody>
-      </p:sp>
-      <p:sp>
-        <p:nvSpPr>
-          <p:cNvPr id="11" name="TextBox 10"/>
-          <p:cNvSpPr/>
-          <p:nvPr>
-            <p:ph type="body" idx="6"/>
-          </p:nvPr>
-        </p:nvSpPr>
-        <p:spPr>
-          <a:xfrm>
-            <a:off x="6233160" y="2395727"/>
-            <a:ext cx="5501640" cy="1097281"/>
-          </a:xfrm>
-          <a:prstGeom prst="rect">
-            <a:avLst/>
-          </a:prstGeom>
-          <a:noFill/>
-        </p:spPr>
-        <p:txBody>
-          <a:bodyPr wrap="square" lIns="0" rIns="0">
-            <a:noAutofit/>
-          </a:bodyPr>
-          <a:lstStyle/>
-          <a:p>
-            <a:pPr algn="l"/>
-            <a:r>
-              <a:rPr sz="3400" b="0" i="0">
-                <a:solidFill>
-                  <a:srgbClr val="0A2240"/>
-                </a:solidFill>
-                <a:latin typeface="Arial"/>
-              </a:rPr>
-              <a:t>Thin margins and a small team</a:t>
-            </a:r>
-          </a:p>
-        </p:txBody>
-      </p:sp>
-      <p:sp>
-        <p:nvSpPr>
-          <p:cNvPr id="12" name="TextBox 11"/>
-          <p:cNvSpPr/>
-          <p:nvPr>
-            <p:ph type="body" idx="7"/>
-          </p:nvPr>
-        </p:nvSpPr>
-        <p:spPr>
-          <a:xfrm>
-            <a:off x="457200" y="3767328"/>
-            <a:ext cx="5501640" cy="621791"/>
-          </a:xfrm>
-          <a:prstGeom prst="rect">
-            <a:avLst/>
-          </a:prstGeom>
-          <a:noFill/>
-        </p:spPr>
-        <p:txBody>
-          <a:bodyPr wrap="none" lIns="0" rIns="0">
-            <a:noAutofit/>
-          </a:bodyPr>
-          <a:lstStyle/>
-          <a:p>
-            <a:pPr algn="l"/>
-            <a:r>
-              <a:rPr sz="3400" b="1" i="0">
-                <a:solidFill>
-                  <a:srgbClr val="0072CE"/>
-                </a:solidFill>
-                <a:latin typeface="Arial"/>
-              </a:rPr>
-              <a:t>Opportunities</a:t>
-            </a:r>
-          </a:p>
-        </p:txBody>
-      </p:sp>
-      <p:sp>
-        <p:nvSpPr>
-          <p:cNvPr id="13" name="Rectangle 12"/>
-          <p:cNvSpPr/>
-          <p:nvPr>
-            <p:ph type="body" idx="8"/>
-          </p:nvPr>
-        </p:nvSpPr>
-        <p:spPr>
-          <a:xfrm>
-            <a:off x="457200" y="4443983"/>
-            <a:ext cx="1650492" cy="54864"/>
-          </a:xfrm>
-          <a:prstGeom prst="rect">
-            <a:avLst/>
-          </a:prstGeom>
-          <a:solidFill>
-            <a:srgbClr val="0072CE"/>
-          </a:solidFill>
-          <a:ln>
-            <a:noFill/>
-          </a:ln>
-          <a:effectLst/>
-        </p:spPr>
-        <p:txBody>
-          <a:bodyPr rtlCol="0" anchor="ctr"/>
-          <a:lstStyle/>
-          <a:p>
-            <a:pPr algn="ctr"/>
-          </a:p>
-        </p:txBody>
-      </p:sp>
-      <p:sp>
-        <p:nvSpPr>
-          <p:cNvPr id="14" name="TextBox 13"/>
-          <p:cNvSpPr/>
-          <p:nvPr>
-            <p:ph type="body" idx="9"/>
-          </p:nvPr>
-        </p:nvSpPr>
-        <p:spPr>
-          <a:xfrm>
-            <a:off x="457200" y="4663439"/>
-            <a:ext cx="5501640" cy="1097281"/>
-          </a:xfrm>
-          <a:prstGeom prst="rect">
-            <a:avLst/>
-          </a:prstGeom>
-          <a:noFill/>
-        </p:spPr>
-        <p:txBody>
-          <a:bodyPr wrap="square" lIns="0" rIns="0">
-            <a:noAutofit/>
-          </a:bodyPr>
-          <a:lstStyle/>
-          <a:p>
-            <a:pPr algn="l"/>
-            <a:r>
-              <a:rPr sz="3400" b="0" i="0">
-                <a:solidFill>
-                  <a:srgbClr val="0A2240"/>
-                </a:solidFill>
-                <a:latin typeface="Arial"/>
-              </a:rPr>
-              <a:t>New markets through partnerships</a:t>
-            </a:r>
-          </a:p>
-        </p:txBody>
-      </p:sp>
-      <p:sp>
-        <p:nvSpPr>
-          <p:cNvPr id="15" name="TextBox 14"/>
-          <p:cNvSpPr/>
-          <p:nvPr>
-            <p:ph type="body" idx="13"/>
-          </p:nvPr>
-        </p:nvSpPr>
-        <p:spPr>
-          <a:xfrm>
-            <a:off x="6233160" y="3767328"/>
-            <a:ext cx="5501640" cy="621791"/>
-          </a:xfrm>
-          <a:prstGeom prst="rect">
-            <a:avLst/>
-          </a:prstGeom>
-          <a:noFill/>
-        </p:spPr>
-        <p:txBody>
-          <a:bodyPr wrap="none" lIns="0" rIns="0">
-            <a:noAutofit/>
-          </a:bodyPr>
-          <a:lstStyle/>
-          <a:p>
-            <a:pPr algn="l"/>
-            <a:r>
-              <a:rPr sz="3400" b="1" i="0">
-                <a:solidFill>
-                  <a:srgbClr val="5B6B82"/>
-                </a:solidFill>
-                <a:latin typeface="Arial"/>
-              </a:rPr>
-              <a:t>Threats</a:t>
-            </a:r>
-          </a:p>
-        </p:txBody>
-      </p:sp>
-      <p:sp>
-        <p:nvSpPr>
-          <p:cNvPr id="16" name="Rectangle 15"/>
-          <p:cNvSpPr/>
-          <p:nvPr>
-            <p:ph type="body" idx="14"/>
-          </p:nvPr>
-        </p:nvSpPr>
-        <p:spPr>
-          <a:xfrm>
-            <a:off x="6233160" y="4443983"/>
-            <a:ext cx="1650492" cy="54864"/>
-          </a:xfrm>
-          <a:prstGeom prst="rect">
-            <a:avLst/>
-          </a:prstGeom>
-          <a:solidFill>
-            <a:srgbClr val="5B6B82"/>
-          </a:solidFill>
-          <a:ln>
-            <a:noFill/>
-          </a:ln>
-          <a:effectLst/>
-        </p:spPr>
-        <p:txBody>
-          <a:bodyPr rtlCol="0" anchor="ctr"/>
-          <a:lstStyle/>
-          <a:p>
-            <a:pPr algn="ctr"/>
-          </a:p>
-        </p:txBody>
-      </p:sp>
-      <p:sp>
-        <p:nvSpPr>
-          <p:cNvPr id="17" name="TextBox 16"/>
-          <p:cNvSpPr/>
-          <p:nvPr>
-            <p:ph type="body" idx="15"/>
-          </p:nvPr>
-        </p:nvSpPr>
-        <p:spPr>
-          <a:xfrm>
-            <a:off x="6233160" y="4663439"/>
-            <a:ext cx="5501640" cy="1097281"/>
-          </a:xfrm>
-          <a:prstGeom prst="rect">
-            <a:avLst/>
-          </a:prstGeom>
-          <a:noFill/>
-        </p:spPr>
-        <p:txBody>
-          <a:bodyPr wrap="square" lIns="0" rIns="0">
-            <a:noAutofit/>
-          </a:bodyPr>
-          <a:lstStyle/>
-          <a:p>
-            <a:pPr algn="l"/>
-            <a:r>
-              <a:rPr sz="3400" b="0" i="0">
-                <a:solidFill>
-                  <a:srgbClr val="0A2240"/>
-                </a:solidFill>
-                <a:latin typeface="Arial"/>
-              </a:rPr>
-              <a:t>New entrants driving price pressure</a:t>
-            </a:r>
-          </a:p>
-        </p:txBody>
-      </p:sp>
-    </p:spTree>
-    <p:extLst>
-      <p:ext uri="{BB962C8B-B14F-4D97-AF65-F5344CB8AC3E}">
-        <p14:creationId xmlns:p14="http://schemas.microsoft.com/office/powerpoint/2010/main" val="1212999818"/>
-      </p:ext>
-    </p:extLst>
-  </p:cSld>
-  <p:clrMapOvr>
-    <a:masterClrMapping/>
-  </p:clrMapOvr>
-</p:sldLayout>
-</file>
-
-<file path=ppt/slideLayouts/slideLayout41.xml><?xml version="1.0" encoding="utf-8"?>
 <p:sldLayout xmlns:a="http://schemas.openxmlformats.org/drawingml/2006/main" xmlns:r="http://schemas.openxmlformats.org/officeDocument/2006/relationships" xmlns:p="http://schemas.openxmlformats.org/presentationml/2006/main" type="blank" preserve="1">
   <p:cSld name="slidekit · Comparison Matrix">
     <p:bg>
@@ -16586,7 +15928,6 @@
     <p:sldLayoutId id="2147483738" r:id="rId39"/>
     <p:sldLayoutId id="2147483739" r:id="rId40"/>
     <p:sldLayoutId id="2147483740" r:id="rId41"/>
-    <p:sldLayoutId id="2147483741" r:id="rId42"/>
   </p:sldLayoutIdLst>
   <p:txStyles>
     <p:titleStyle>
@@ -17158,7 +16499,7 @@
             <a:fld id="{4B0E1F8A-6C1D-4E2A-9F3B-7A5C8D2E1F60}" type="slidenum">
               <a:rPr sz="1600" b="0" i="0">
                 <a:solidFill>
-                  <a:srgbClr val="5B6B82"/>
+                  <a:srgbClr val="0A2240"/>
                 </a:solidFill>
                 <a:latin typeface="Arial"/>
               </a:rPr>
@@ -17300,7 +16641,7 @@
             <a:fld id="{4B0E1F8A-6C1D-4E2A-9F3B-7A5C8D2E1F60}" type="slidenum">
               <a:rPr sz="1600" b="0" i="0">
                 <a:solidFill>
-                  <a:srgbClr val="5B6B82"/>
+                  <a:srgbClr val="0A2240"/>
                 </a:solidFill>
                 <a:latin typeface="Arial"/>
               </a:rPr>
@@ -17477,7 +16818,7 @@
             <a:fld id="{4B0E1F8A-6C1D-4E2A-9F3B-7A5C8D2E1F60}" type="slidenum">
               <a:rPr sz="1600" b="0" i="0">
                 <a:solidFill>
-                  <a:srgbClr val="5B6B82"/>
+                  <a:srgbClr val="0A2240"/>
                 </a:solidFill>
                 <a:latin typeface="Arial"/>
               </a:rPr>
@@ -17969,7 +17310,7 @@
             <a:fld id="{4B0E1F8A-6C1D-4E2A-9F3B-7A5C8D2E1F60}" type="slidenum">
               <a:rPr sz="1600" b="0" i="0">
                 <a:solidFill>
-                  <a:srgbClr val="5B6B82"/>
+                  <a:srgbClr val="0A2240"/>
                 </a:solidFill>
                 <a:latin typeface="Arial"/>
               </a:rPr>
@@ -18207,7 +17548,7 @@
             <a:fld id="{4B0E1F8A-6C1D-4E2A-9F3B-7A5C8D2E1F60}" type="slidenum">
               <a:rPr sz="1600" b="0" i="0">
                 <a:solidFill>
-                  <a:srgbClr val="5B6B82"/>
+                  <a:srgbClr val="0A2240"/>
                 </a:solidFill>
                 <a:latin typeface="Arial"/>
               </a:rPr>
@@ -18445,7 +17786,7 @@
             <a:fld id="{4B0E1F8A-6C1D-4E2A-9F3B-7A5C8D2E1F60}" type="slidenum">
               <a:rPr sz="1600" b="0" i="0">
                 <a:solidFill>
-                  <a:srgbClr val="5B6B82"/>
+                  <a:srgbClr val="0A2240"/>
                 </a:solidFill>
                 <a:latin typeface="Arial"/>
               </a:rPr>
@@ -18683,7 +18024,7 @@
             <a:fld id="{4B0E1F8A-6C1D-4E2A-9F3B-7A5C8D2E1F60}" type="slidenum">
               <a:rPr sz="1600" b="0" i="0">
                 <a:solidFill>
-                  <a:srgbClr val="5B6B82"/>
+                  <a:srgbClr val="0A2240"/>
                 </a:solidFill>
                 <a:latin typeface="Arial"/>
               </a:rPr>
@@ -18921,7 +18262,7 @@
             <a:fld id="{4B0E1F8A-6C1D-4E2A-9F3B-7A5C8D2E1F60}" type="slidenum">
               <a:rPr sz="1600" b="0" i="0">
                 <a:solidFill>
-                  <a:srgbClr val="5B6B82"/>
+                  <a:srgbClr val="0A2240"/>
                 </a:solidFill>
                 <a:latin typeface="Arial"/>
               </a:rPr>
@@ -19413,7 +18754,7 @@
             <a:fld id="{4B0E1F8A-6C1D-4E2A-9F3B-7A5C8D2E1F60}" type="slidenum">
               <a:rPr sz="1600" b="0" i="0">
                 <a:solidFill>
-                  <a:srgbClr val="5B6B82"/>
+                  <a:srgbClr val="0A2240"/>
                 </a:solidFill>
                 <a:latin typeface="Arial"/>
               </a:rPr>
